--- a/examples/repositories/sebastian-207/deck.pptx
+++ b/examples/repositories/sebastian-207/deck.pptx
@@ -509,7 +509,7 @@
           <a:p>
             <a:r>
               <a:rPr lang="en-US" dirty="0"/>
-              <a:t>本頁は架空の文化企画を説明する制作例の第1頁です。開催実績、調査値、実在の第三者の発言を示すものではありません。企画条件は協力書店との相談で決める想定です。</a:t>
+              <a:t>第1頁。読むことと街を歩くことを、一冊の編集へつなぐ。 。架空の企画であり開催実績や測定値ではありません。場所・時間・参加方法は協力書店と相談して決める想定です。</a:t>
             </a:r>
             <a:endParaRPr lang="en-US" dirty="0"/>
           </a:p>
@@ -597,7 +597,7 @@
           <a:p>
             <a:r>
               <a:rPr lang="en-US" dirty="0"/>
-              <a:t>本頁は架空の文化企画を説明する制作例の第2頁です。開催実績、調査値、実在の第三者の発言を示すものではありません。企画条件は協力書店との相談で決める想定です。</a:t>
+              <a:t>第2頁。本・場所・参加方法・成果物を先に決める。 使う場所｜既存の書棚と編集台 / 参加の入口｜本を選び、気になる言葉をメモする / 持ち寄る物｜街の写真と短い文章 / 残す物｜参加者が一緒に編集した小冊子。架空の企画であり開催実績や測定値ではありません。場所・時間・参加方法は協力書店と相談して決める想定です。</a:t>
             </a:r>
             <a:endParaRPr lang="en-US" dirty="0"/>
           </a:p>
@@ -685,7 +685,7 @@
           <a:p>
             <a:r>
               <a:rPr lang="en-US" dirty="0"/>
-              <a:t>本頁は架空の文化企画を説明する制作例の第3頁です。開催実績、調査値、実在の第三者の発言を示すものではありません。企画条件は協力書店との相談で決める想定です。</a:t>
+              <a:t>第3頁。知識を受け取るだけでなく、経験を編集して返す。 読む｜気になる一冊を選ぶ / 歩く｜言葉につながる場所を探す / 持ち寄る｜写真と短文を共有する。架空の企画であり開催実績や測定値ではありません。場所・時間・参加方法は協力書店と相談して決める想定です。</a:t>
             </a:r>
             <a:endParaRPr lang="en-US" dirty="0"/>
           </a:p>
@@ -773,7 +773,7 @@
           <a:p>
             <a:r>
               <a:rPr lang="en-US" dirty="0"/>
-              <a:t>本頁は架空の文化企画を説明する制作例の第4頁です。開催実績、調査値、実在の第三者の発言を示すものではありません。企画条件は協力書店との相談で決める想定です。</a:t>
+              <a:t>第4頁。読書のよさを守りながら、共有の時間を少し足す。 一人で本を選び、読む / 感想は自分の中で整理する / 街での体験とは別々に持ち帰る / 一冊と言葉を紹介し合う / 街の写真と短文を持ち寄る / 一緒に編集して小冊子に残す。架空の企画であり開催実績や測定値ではありません。場所・時間・参加方法は協力書店と相談して決める想定です。</a:t>
             </a:r>
             <a:endParaRPr lang="en-US" dirty="0"/>
           </a:p>
@@ -861,7 +861,7 @@
           <a:p>
             <a:r>
               <a:rPr lang="en-US" dirty="0"/>
-              <a:t>本頁は架空の文化企画を説明する制作例の第5頁です。開催実績、調査値、実在の第三者の発言を示すものではありません。企画条件は協力書店との相談で決める想定です。</a:t>
+              <a:t>第5頁。街を見る目の違いを楽しむ。 一冊を選ぶ｜心に残る言葉をひとつ / 街を歩く｜その言葉と出会う場所を探す / 一頁にする｜写真と短文を編集する。架空の企画であり開催実績や測定値ではありません。場所・時間・参加方法は協力書店と相談して決める想定です。</a:t>
             </a:r>
             <a:endParaRPr lang="en-US" dirty="0"/>
           </a:p>
@@ -949,7 +949,7 @@
           <a:p>
             <a:r>
               <a:rPr lang="en-US" dirty="0"/>
-              <a:t>本頁は架空の文化企画を説明する制作例の第6頁です。開催実績、調査値、実在の第三者の発言を示すものではありません。企画条件は協力書店との相談で決める想定です。</a:t>
+              <a:t>第6頁。読む→歩く→つくる→話す。各時間の長さは運営時に調整する。 選書｜気になる一冊と言葉を選ぶ / 街歩き｜言葉につながる写真を撮る / 編集｜写真と短文を一頁にまとめる / 共有｜頁を見せ合い、感想を話す。架空の企画であり開催実績や測定値ではありません。場所・時間・参加方法は協力書店と相談して決める想定です。</a:t>
             </a:r>
             <a:endParaRPr lang="en-US" dirty="0"/>
           </a:p>
@@ -1037,7 +1037,15 @@
           <a:p>
             <a:r>
               <a:rPr lang="en-US" dirty="0"/>
-              <a:t>本頁は架空の文化企画を説明する制作例の第7頁です。開催実績、調査値、実在の第三者の発言を示すものではありません。企画条件は協力書店との相談で決める想定です。</a:t>
+              <a:t>第7頁。初回は小さく試し、参加者と書店の声から次の形を決める。 第1週
+書店と設計
+運営条件の案 / 第2週
+参加を募る
+本と募集案内 / 第3週
+編集室を試す
+写真と短文 / 第4週
+意見を聞く
+次回の改善案。架空の企画であり開催実績や測定値ではありません。場所・時間・参加方法は協力書店と相談して決める想定です。</a:t>
             </a:r>
             <a:endParaRPr lang="en-US" dirty="0"/>
           </a:p>
@@ -1125,7 +1133,7 @@
           <a:p>
             <a:r>
               <a:rPr lang="en-US" dirty="0"/>
-              <a:t>本頁は架空の文化企画を説明する制作例の第8頁です。開催実績、調査値、実在の第三者の発言を示すものではありません。企画条件は協力書店との相談で決める想定です。</a:t>
+              <a:t>第8頁。企画の次の一歩は、場所と人の無理のない接点を探すこと。 試行に向けて、書店の使い方と参加の入口を話し合う。。架空の企画であり開催実績や測定値ではありません。場所・時間・参加方法は協力書店と相談して決める想定です。</a:t>
             </a:r>
             <a:endParaRPr lang="en-US" dirty="0"/>
           </a:p>
@@ -1604,9 +1612,9 @@
                 <a:solidFill>
                   <a:srgbClr val="C2410C"/>
                 </a:solidFill>
-                <a:latin typeface="Noto Sans CJK JP" pitchFamily="34" charset="0"/>
-                <a:ea typeface="Noto Sans CJK JP" pitchFamily="34" charset="-122"/>
-                <a:cs typeface="Noto Sans CJK JP" pitchFamily="34" charset="-120"/>
+                <a:latin typeface="BIZ UDPGothic" pitchFamily="34" charset="0"/>
+                <a:ea typeface="BIZ UDPGothic" pitchFamily="34" charset="-122"/>
+                <a:cs typeface="BIZ UDPGothic" pitchFamily="34" charset="-120"/>
               </a:rPr>
               <a:t>週末編集室｜架空の企画</a:t>
             </a:r>
@@ -1645,11 +1653,11 @@
                 <a:solidFill>
                   <a:srgbClr val="111111"/>
                 </a:solidFill>
-                <a:latin typeface="Noto Serif CJK JP" pitchFamily="34" charset="0"/>
-                <a:ea typeface="Noto Serif CJK JP" pitchFamily="34" charset="-122"/>
-                <a:cs typeface="Noto Serif CJK JP" pitchFamily="34" charset="-120"/>
-              </a:rPr>
-              <a:t>まちを、</a:t>
+                <a:latin typeface="Shippori Mincho" pitchFamily="34" charset="0"/>
+                <a:ea typeface="Shippori Mincho" pitchFamily="34" charset="-122"/>
+                <a:cs typeface="Shippori Mincho" pitchFamily="34" charset="-120"/>
+              </a:rPr>
+              <a:t>書店の</a:t>
             </a:r>
             <a:endParaRPr lang="en-US" sz="4500" dirty="0"/>
           </a:p>
@@ -1662,11 +1670,11 @@
                 <a:solidFill>
                   <a:srgbClr val="111111"/>
                 </a:solidFill>
-                <a:latin typeface="Noto Serif CJK JP" pitchFamily="34" charset="0"/>
-                <a:ea typeface="Noto Serif CJK JP" pitchFamily="34" charset="-122"/>
-                <a:cs typeface="Noto Serif CJK JP" pitchFamily="34" charset="-120"/>
-              </a:rPr>
-              <a:t>余白から。</a:t>
+                <a:latin typeface="Shippori Mincho" pitchFamily="34" charset="0"/>
+                <a:ea typeface="Shippori Mincho" pitchFamily="34" charset="-122"/>
+                <a:cs typeface="Shippori Mincho" pitchFamily="34" charset="-120"/>
+              </a:rPr>
+              <a:t>週末編集室</a:t>
             </a:r>
             <a:endParaRPr lang="en-US" sz="4500" dirty="0"/>
           </a:p>
@@ -1703,11 +1711,11 @@
                 <a:solidFill>
                   <a:srgbClr val="665F58"/>
                 </a:solidFill>
-                <a:latin typeface="Noto Sans CJK JP" pitchFamily="34" charset="0"/>
-                <a:ea typeface="Noto Sans CJK JP" pitchFamily="34" charset="-122"/>
-                <a:cs typeface="Noto Sans CJK JP" pitchFamily="34" charset="-120"/>
-              </a:rPr>
-              <a:t>小さな書店の週末編集室</a:t>
+                <a:latin typeface="BIZ UDPGothic" pitchFamily="34" charset="0"/>
+                <a:ea typeface="BIZ UDPGothic" pitchFamily="34" charset="-122"/>
+                <a:cs typeface="BIZ UDPGothic" pitchFamily="34" charset="-120"/>
+              </a:rPr>
+              <a:t>読む・歩く・編集する</a:t>
             </a:r>
             <a:endParaRPr lang="en-US" sz="1800" dirty="0"/>
           </a:p>
@@ -1720,9 +1728,9 @@
                 <a:solidFill>
                   <a:srgbClr val="665F58"/>
                 </a:solidFill>
-                <a:latin typeface="Noto Sans CJK JP" pitchFamily="34" charset="0"/>
-                <a:ea typeface="Noto Sans CJK JP" pitchFamily="34" charset="-122"/>
-                <a:cs typeface="Noto Sans CJK JP" pitchFamily="34" charset="-120"/>
+                <a:latin typeface="BIZ UDPGothic" pitchFamily="34" charset="0"/>
+                <a:ea typeface="BIZ UDPGothic" pitchFamily="34" charset="-122"/>
+                <a:cs typeface="BIZ UDPGothic" pitchFamily="34" charset="-120"/>
               </a:rPr>
               <a:t>架空の地域文化企画</a:t>
             </a:r>
@@ -1755,7 +1763,7 @@
       </p:sp>
       <p:pic>
         <p:nvPicPr>
-          <p:cNvPr id="9" name="Image 0" descr="/workspace/shared/slide-207-prep/ppt_runs/2026-10-14_machi-yohaku/images/slide_01.png">    </p:cNvPr>
+          <p:cNvPr id="9" name="Image 0" descr="input/images/slide_01.png">    </p:cNvPr>
           <p:cNvPicPr>
             <a:picLocks noChangeAspect="1"/>
           </p:cNvPicPr>
@@ -1868,11 +1876,11 @@
                 <a:solidFill>
                   <a:srgbClr val="111111"/>
                 </a:solidFill>
-                <a:latin typeface="Noto Serif CJK JP" pitchFamily="34" charset="0"/>
-                <a:ea typeface="Noto Serif CJK JP" pitchFamily="34" charset="-122"/>
-                <a:cs typeface="Noto Serif CJK JP" pitchFamily="34" charset="-120"/>
-              </a:rPr>
-              <a:t>週末編集室｜架空の企画</a:t>
+                <a:latin typeface="Shippori Mincho" pitchFamily="34" charset="0"/>
+                <a:ea typeface="Shippori Mincho" pitchFamily="34" charset="-122"/>
+                <a:cs typeface="Shippori Mincho" pitchFamily="34" charset="-120"/>
+              </a:rPr>
+              <a:t>既存の書店で、小さく試す</a:t>
             </a:r>
             <a:endParaRPr lang="en-US" sz="2900" dirty="0"/>
           </a:p>
@@ -1930,9 +1938,9 @@
                 <a:solidFill>
                   <a:srgbClr val="665F58"/>
                 </a:solidFill>
-                <a:latin typeface="DejaVu Sans" pitchFamily="34" charset="0"/>
-                <a:ea typeface="DejaVu Sans" pitchFamily="34" charset="-122"/>
-                <a:cs typeface="DejaVu Sans" pitchFamily="34" charset="-120"/>
+                <a:latin typeface="Manrope" pitchFamily="34" charset="0"/>
+                <a:ea typeface="Manrope" pitchFamily="34" charset="-122"/>
+                <a:cs typeface="Manrope" pitchFamily="34" charset="-120"/>
               </a:rPr>
               <a:t>02 / 08</a:t>
             </a:r>
@@ -1942,82 +1950,22 @@
       </p:sp>
       <p:sp>
         <p:nvSpPr>
-          <p:cNvPr id="5" name="Text 3"/>
-          <p:cNvSpPr txBox="1"/>
-          <p:nvPr/>
-        </p:nvSpPr>
-        <p:spPr>
-          <a:xfrm>
-            <a:off x="932688" y="1481328"/>
-            <a:ext cx="10241280" cy="1508760"/>
-          </a:xfrm>
-          <a:prstGeom prst="rect">
-            <a:avLst/>
-          </a:prstGeom>
-          <a:noFill/>
-          <a:ln/>
-        </p:spPr>
-        <p:txBody>
-          <a:bodyPr wrap="square" lIns="254" tIns="254" rIns="254" bIns="254" rtlCol="0" anchor="ctr">
-            <a:normAutofit/>
-          </a:bodyPr>
-          <a:lstStyle/>
-          <a:p>
-            <a:pPr algn="l" indent="0" marL="0">
-              <a:buNone/>
-            </a:pPr>
-            <a:r>
-              <a:rPr lang="en-US" sz="4600" b="1" dirty="0">
-                <a:solidFill>
-                  <a:srgbClr val="111111"/>
-                </a:solidFill>
-                <a:latin typeface="Noto Serif CJK JP" pitchFamily="34" charset="0"/>
-                <a:ea typeface="Noto Serif CJK JP" pitchFamily="34" charset="-122"/>
-                <a:cs typeface="Noto Serif CJK JP" pitchFamily="34" charset="-120"/>
-              </a:rPr>
-              <a:t>本を売る場所から、</a:t>
-            </a:r>
-            <a:endParaRPr lang="en-US" sz="4600" dirty="0"/>
-          </a:p>
-          <a:p>
-            <a:pPr algn="l" indent="0" marL="0">
-              <a:buNone/>
-            </a:pPr>
-            <a:r>
-              <a:rPr lang="en-US" sz="4600" b="1" dirty="0">
-                <a:solidFill>
-                  <a:srgbClr val="111111"/>
-                </a:solidFill>
-                <a:latin typeface="Noto Serif CJK JP" pitchFamily="34" charset="0"/>
-                <a:ea typeface="Noto Serif CJK JP" pitchFamily="34" charset="-122"/>
-                <a:cs typeface="Noto Serif CJK JP" pitchFamily="34" charset="-120"/>
-              </a:rPr>
-              <a:t>まちを編集する場所へ。</a:t>
-            </a:r>
-            <a:endParaRPr lang="en-US" sz="4600" dirty="0"/>
-          </a:p>
-        </p:txBody>
-      </p:sp>
-      <p:sp>
-        <p:nvSpPr>
-          <p:cNvPr id="6" name="Shape 4"/>
+          <p:cNvPr id="5" name="Shape 3"/>
           <p:cNvSpPr/>
           <p:nvPr/>
         </p:nvSpPr>
         <p:spPr>
           <a:xfrm>
-            <a:off x="960120" y="3090672"/>
-            <a:ext cx="45720" cy="1051560"/>
-          </a:xfrm>
-          <a:prstGeom prst="rect">
-            <a:avLst/>
-          </a:prstGeom>
-          <a:solidFill>
-            <a:srgbClr val="C2410C"/>
-          </a:solidFill>
-          <a:ln w="12700">
+            <a:off x="960120" y="1645920"/>
+            <a:ext cx="4754880" cy="0"/>
+          </a:xfrm>
+          <a:prstGeom prst="line">
+            <a:avLst/>
+          </a:prstGeom>
+          <a:noFill/>
+          <a:ln w="7620">
             <a:solidFill>
-              <a:srgbClr val="C2410C"/>
+              <a:srgbClr val="D7CCB9"/>
             </a:solidFill>
             <a:prstDash val="solid"/>
           </a:ln>
@@ -2025,14 +1973,55 @@
       </p:sp>
       <p:sp>
         <p:nvSpPr>
+          <p:cNvPr id="6" name="Text 4"/>
+          <p:cNvSpPr txBox="1"/>
+          <p:nvPr/>
+        </p:nvSpPr>
+        <p:spPr>
+          <a:xfrm>
+            <a:off x="960120" y="1865376"/>
+            <a:ext cx="4754880" cy="320040"/>
+          </a:xfrm>
+          <a:prstGeom prst="rect">
+            <a:avLst/>
+          </a:prstGeom>
+          <a:noFill/>
+          <a:ln/>
+        </p:spPr>
+        <p:txBody>
+          <a:bodyPr wrap="square" lIns="254" tIns="254" rIns="254" bIns="254" rtlCol="0" anchor="ctr">
+            <a:normAutofit/>
+          </a:bodyPr>
+          <a:lstStyle/>
+          <a:p>
+            <a:pPr algn="l" indent="0" marL="0">
+              <a:buNone/>
+            </a:pPr>
+            <a:r>
+              <a:rPr lang="en-US" sz="1600" b="1" dirty="0">
+                <a:solidFill>
+                  <a:srgbClr val="C2410C"/>
+                </a:solidFill>
+                <a:latin typeface="BIZ UDPGothic" pitchFamily="34" charset="0"/>
+                <a:ea typeface="BIZ UDPGothic" pitchFamily="34" charset="-122"/>
+                <a:cs typeface="BIZ UDPGothic" pitchFamily="34" charset="-120"/>
+              </a:rPr>
+              <a:t>使う場所</a:t>
+            </a:r>
+            <a:endParaRPr lang="en-US" sz="1600" dirty="0"/>
+          </a:p>
+        </p:txBody>
+      </p:sp>
+      <p:sp>
+        <p:nvSpPr>
           <p:cNvPr id="7" name="Text 5"/>
           <p:cNvSpPr txBox="1"/>
           <p:nvPr/>
         </p:nvSpPr>
         <p:spPr>
           <a:xfrm>
-            <a:off x="1124712" y="3090672"/>
-            <a:ext cx="7333488" cy="219456"/>
+            <a:off x="960120" y="2450592"/>
+            <a:ext cx="4754880" cy="841248"/>
           </a:xfrm>
           <a:prstGeom prst="rect">
             <a:avLst/>
@@ -2050,30 +2039,94 @@
               <a:buNone/>
             </a:pPr>
             <a:r>
-              <a:rPr lang="en-US" sz="1000" b="1" dirty="0">
+              <a:rPr lang="en-US" sz="2300" dirty="0">
+                <a:solidFill>
+                  <a:srgbClr val="111111"/>
+                </a:solidFill>
+                <a:latin typeface="BIZ UDPGothic" pitchFamily="34" charset="0"/>
+                <a:ea typeface="BIZ UDPGothic" pitchFamily="34" charset="-122"/>
+                <a:cs typeface="BIZ UDPGothic" pitchFamily="34" charset="-120"/>
+              </a:rPr>
+              <a:t>既存の書棚と編集台</a:t>
+            </a:r>
+            <a:endParaRPr lang="en-US" sz="2300" dirty="0"/>
+          </a:p>
+        </p:txBody>
+      </p:sp>
+      <p:sp>
+        <p:nvSpPr>
+          <p:cNvPr id="8" name="Shape 6"/>
+          <p:cNvSpPr/>
+          <p:nvPr/>
+        </p:nvSpPr>
+        <p:spPr>
+          <a:xfrm>
+            <a:off x="6446520" y="1645920"/>
+            <a:ext cx="4754880" cy="0"/>
+          </a:xfrm>
+          <a:prstGeom prst="line">
+            <a:avLst/>
+          </a:prstGeom>
+          <a:noFill/>
+          <a:ln w="7620">
+            <a:solidFill>
+              <a:srgbClr val="D7CCB9"/>
+            </a:solidFill>
+            <a:prstDash val="solid"/>
+          </a:ln>
+        </p:spPr>
+      </p:sp>
+      <p:sp>
+        <p:nvSpPr>
+          <p:cNvPr id="9" name="Text 7"/>
+          <p:cNvSpPr txBox="1"/>
+          <p:nvPr/>
+        </p:nvSpPr>
+        <p:spPr>
+          <a:xfrm>
+            <a:off x="6446520" y="1865376"/>
+            <a:ext cx="4754880" cy="320040"/>
+          </a:xfrm>
+          <a:prstGeom prst="rect">
+            <a:avLst/>
+          </a:prstGeom>
+          <a:noFill/>
+          <a:ln/>
+        </p:spPr>
+        <p:txBody>
+          <a:bodyPr wrap="square" lIns="254" tIns="254" rIns="254" bIns="254" rtlCol="0" anchor="ctr">
+            <a:normAutofit/>
+          </a:bodyPr>
+          <a:lstStyle/>
+          <a:p>
+            <a:pPr algn="l" indent="0" marL="0">
+              <a:buNone/>
+            </a:pPr>
+            <a:r>
+              <a:rPr lang="en-US" sz="1600" b="1" dirty="0">
                 <a:solidFill>
                   <a:srgbClr val="C2410C"/>
                 </a:solidFill>
-                <a:latin typeface="Noto Sans CJK JP" pitchFamily="34" charset="0"/>
-                <a:ea typeface="Noto Sans CJK JP" pitchFamily="34" charset="-122"/>
-                <a:cs typeface="Noto Sans CJK JP" pitchFamily="34" charset="-120"/>
-              </a:rPr>
-              <a:t>企画の意図</a:t>
-            </a:r>
-            <a:endParaRPr lang="en-US" sz="1000" dirty="0"/>
-          </a:p>
-        </p:txBody>
-      </p:sp>
-      <p:sp>
-        <p:nvSpPr>
-          <p:cNvPr id="8" name="Text 6"/>
-          <p:cNvSpPr txBox="1"/>
-          <p:nvPr/>
-        </p:nvSpPr>
-        <p:spPr>
-          <a:xfrm>
-            <a:off x="1124712" y="3419856"/>
-            <a:ext cx="7333488" cy="722376"/>
+                <a:latin typeface="BIZ UDPGothic" pitchFamily="34" charset="0"/>
+                <a:ea typeface="BIZ UDPGothic" pitchFamily="34" charset="-122"/>
+                <a:cs typeface="BIZ UDPGothic" pitchFamily="34" charset="-120"/>
+              </a:rPr>
+              <a:t>参加の入口</a:t>
+            </a:r>
+            <a:endParaRPr lang="en-US" sz="1600" dirty="0"/>
+          </a:p>
+        </p:txBody>
+      </p:sp>
+      <p:sp>
+        <p:nvSpPr>
+          <p:cNvPr id="10" name="Text 8"/>
+          <p:cNvSpPr txBox="1"/>
+          <p:nvPr/>
+        </p:nvSpPr>
+        <p:spPr>
+          <a:xfrm>
+            <a:off x="6446520" y="2450592"/>
+            <a:ext cx="4754880" cy="841248"/>
           </a:xfrm>
           <a:prstGeom prst="rect">
             <a:avLst/>
@@ -2091,17 +2144,227 @@
               <a:buNone/>
             </a:pPr>
             <a:r>
-              <a:rPr lang="en-US" sz="1800" b="1" dirty="0">
+              <a:rPr lang="en-US" sz="2300" dirty="0">
                 <a:solidFill>
                   <a:srgbClr val="111111"/>
                 </a:solidFill>
-                <a:latin typeface="Noto Sans CJK JP" pitchFamily="34" charset="0"/>
-                <a:ea typeface="Noto Sans CJK JP" pitchFamily="34" charset="-122"/>
-                <a:cs typeface="Noto Sans CJK JP" pitchFamily="34" charset="-120"/>
-              </a:rPr>
-              <a:t>棚の外にある物語を、書店の中へ。</a:t>
-            </a:r>
-            <a:endParaRPr lang="en-US" sz="1800" dirty="0"/>
+                <a:latin typeface="BIZ UDPGothic" pitchFamily="34" charset="0"/>
+                <a:ea typeface="BIZ UDPGothic" pitchFamily="34" charset="-122"/>
+                <a:cs typeface="BIZ UDPGothic" pitchFamily="34" charset="-120"/>
+              </a:rPr>
+              <a:t>本を選び、言葉をメモ</a:t>
+            </a:r>
+            <a:endParaRPr lang="en-US" sz="2300" dirty="0"/>
+          </a:p>
+        </p:txBody>
+      </p:sp>
+      <p:sp>
+        <p:nvSpPr>
+          <p:cNvPr id="11" name="Shape 9"/>
+          <p:cNvSpPr/>
+          <p:nvPr/>
+        </p:nvSpPr>
+        <p:spPr>
+          <a:xfrm>
+            <a:off x="960120" y="4023360"/>
+            <a:ext cx="4754880" cy="0"/>
+          </a:xfrm>
+          <a:prstGeom prst="line">
+            <a:avLst/>
+          </a:prstGeom>
+          <a:noFill/>
+          <a:ln w="7620">
+            <a:solidFill>
+              <a:srgbClr val="D7CCB9"/>
+            </a:solidFill>
+            <a:prstDash val="solid"/>
+          </a:ln>
+        </p:spPr>
+      </p:sp>
+      <p:sp>
+        <p:nvSpPr>
+          <p:cNvPr id="12" name="Text 10"/>
+          <p:cNvSpPr txBox="1"/>
+          <p:nvPr/>
+        </p:nvSpPr>
+        <p:spPr>
+          <a:xfrm>
+            <a:off x="960120" y="4242816"/>
+            <a:ext cx="4754880" cy="320040"/>
+          </a:xfrm>
+          <a:prstGeom prst="rect">
+            <a:avLst/>
+          </a:prstGeom>
+          <a:noFill/>
+          <a:ln/>
+        </p:spPr>
+        <p:txBody>
+          <a:bodyPr wrap="square" lIns="254" tIns="254" rIns="254" bIns="254" rtlCol="0" anchor="ctr">
+            <a:normAutofit/>
+          </a:bodyPr>
+          <a:lstStyle/>
+          <a:p>
+            <a:pPr algn="l" indent="0" marL="0">
+              <a:buNone/>
+            </a:pPr>
+            <a:r>
+              <a:rPr lang="en-US" sz="1600" b="1" dirty="0">
+                <a:solidFill>
+                  <a:srgbClr val="C2410C"/>
+                </a:solidFill>
+                <a:latin typeface="BIZ UDPGothic" pitchFamily="34" charset="0"/>
+                <a:ea typeface="BIZ UDPGothic" pitchFamily="34" charset="-122"/>
+                <a:cs typeface="BIZ UDPGothic" pitchFamily="34" charset="-120"/>
+              </a:rPr>
+              <a:t>持ち寄る物</a:t>
+            </a:r>
+            <a:endParaRPr lang="en-US" sz="1600" dirty="0"/>
+          </a:p>
+        </p:txBody>
+      </p:sp>
+      <p:sp>
+        <p:nvSpPr>
+          <p:cNvPr id="13" name="Text 11"/>
+          <p:cNvSpPr txBox="1"/>
+          <p:nvPr/>
+        </p:nvSpPr>
+        <p:spPr>
+          <a:xfrm>
+            <a:off x="960120" y="4828032"/>
+            <a:ext cx="4754880" cy="841248"/>
+          </a:xfrm>
+          <a:prstGeom prst="rect">
+            <a:avLst/>
+          </a:prstGeom>
+          <a:noFill/>
+          <a:ln/>
+        </p:spPr>
+        <p:txBody>
+          <a:bodyPr wrap="square" lIns="254" tIns="254" rIns="254" bIns="254" rtlCol="0" anchor="ctr">
+            <a:normAutofit/>
+          </a:bodyPr>
+          <a:lstStyle/>
+          <a:p>
+            <a:pPr algn="l" indent="0" marL="0">
+              <a:buNone/>
+            </a:pPr>
+            <a:r>
+              <a:rPr lang="en-US" sz="2300" dirty="0">
+                <a:solidFill>
+                  <a:srgbClr val="111111"/>
+                </a:solidFill>
+                <a:latin typeface="BIZ UDPGothic" pitchFamily="34" charset="0"/>
+                <a:ea typeface="BIZ UDPGothic" pitchFamily="34" charset="-122"/>
+                <a:cs typeface="BIZ UDPGothic" pitchFamily="34" charset="-120"/>
+              </a:rPr>
+              <a:t>街の写真と短い文章</a:t>
+            </a:r>
+            <a:endParaRPr lang="en-US" sz="2300" dirty="0"/>
+          </a:p>
+        </p:txBody>
+      </p:sp>
+      <p:sp>
+        <p:nvSpPr>
+          <p:cNvPr id="14" name="Shape 12"/>
+          <p:cNvSpPr/>
+          <p:nvPr/>
+        </p:nvSpPr>
+        <p:spPr>
+          <a:xfrm>
+            <a:off x="6446520" y="4023360"/>
+            <a:ext cx="4754880" cy="0"/>
+          </a:xfrm>
+          <a:prstGeom prst="line">
+            <a:avLst/>
+          </a:prstGeom>
+          <a:noFill/>
+          <a:ln w="7620">
+            <a:solidFill>
+              <a:srgbClr val="D7CCB9"/>
+            </a:solidFill>
+            <a:prstDash val="solid"/>
+          </a:ln>
+        </p:spPr>
+      </p:sp>
+      <p:sp>
+        <p:nvSpPr>
+          <p:cNvPr id="15" name="Text 13"/>
+          <p:cNvSpPr txBox="1"/>
+          <p:nvPr/>
+        </p:nvSpPr>
+        <p:spPr>
+          <a:xfrm>
+            <a:off x="6446520" y="4242816"/>
+            <a:ext cx="4754880" cy="320040"/>
+          </a:xfrm>
+          <a:prstGeom prst="rect">
+            <a:avLst/>
+          </a:prstGeom>
+          <a:noFill/>
+          <a:ln/>
+        </p:spPr>
+        <p:txBody>
+          <a:bodyPr wrap="square" lIns="254" tIns="254" rIns="254" bIns="254" rtlCol="0" anchor="ctr">
+            <a:normAutofit/>
+          </a:bodyPr>
+          <a:lstStyle/>
+          <a:p>
+            <a:pPr algn="l" indent="0" marL="0">
+              <a:buNone/>
+            </a:pPr>
+            <a:r>
+              <a:rPr lang="en-US" sz="1600" b="1" dirty="0">
+                <a:solidFill>
+                  <a:srgbClr val="C2410C"/>
+                </a:solidFill>
+                <a:latin typeface="BIZ UDPGothic" pitchFamily="34" charset="0"/>
+                <a:ea typeface="BIZ UDPGothic" pitchFamily="34" charset="-122"/>
+                <a:cs typeface="BIZ UDPGothic" pitchFamily="34" charset="-120"/>
+              </a:rPr>
+              <a:t>残す物</a:t>
+            </a:r>
+            <a:endParaRPr lang="en-US" sz="1600" dirty="0"/>
+          </a:p>
+        </p:txBody>
+      </p:sp>
+      <p:sp>
+        <p:nvSpPr>
+          <p:cNvPr id="16" name="Text 14"/>
+          <p:cNvSpPr txBox="1"/>
+          <p:nvPr/>
+        </p:nvSpPr>
+        <p:spPr>
+          <a:xfrm>
+            <a:off x="6446520" y="4828032"/>
+            <a:ext cx="4754880" cy="841248"/>
+          </a:xfrm>
+          <a:prstGeom prst="rect">
+            <a:avLst/>
+          </a:prstGeom>
+          <a:noFill/>
+          <a:ln/>
+        </p:spPr>
+        <p:txBody>
+          <a:bodyPr wrap="square" lIns="254" tIns="254" rIns="254" bIns="254" rtlCol="0" anchor="ctr">
+            <a:normAutofit/>
+          </a:bodyPr>
+          <a:lstStyle/>
+          <a:p>
+            <a:pPr algn="l" indent="0" marL="0">
+              <a:buNone/>
+            </a:pPr>
+            <a:r>
+              <a:rPr lang="en-US" sz="2300" dirty="0">
+                <a:solidFill>
+                  <a:srgbClr val="111111"/>
+                </a:solidFill>
+                <a:latin typeface="BIZ UDPGothic" pitchFamily="34" charset="0"/>
+                <a:ea typeface="BIZ UDPGothic" pitchFamily="34" charset="-122"/>
+                <a:cs typeface="BIZ UDPGothic" pitchFamily="34" charset="-120"/>
+              </a:rPr>
+              <a:t>一緒に編集した小冊子</a:t>
+            </a:r>
+            <a:endParaRPr lang="en-US" sz="2300" dirty="0"/>
           </a:p>
         </p:txBody>
       </p:sp>
@@ -2168,11 +2431,11 @@
                 <a:solidFill>
                   <a:srgbClr val="111111"/>
                 </a:solidFill>
-                <a:latin typeface="Noto Serif CJK JP" pitchFamily="34" charset="0"/>
-                <a:ea typeface="Noto Serif CJK JP" pitchFamily="34" charset="-122"/>
-                <a:cs typeface="Noto Serif CJK JP" pitchFamily="34" charset="-120"/>
-              </a:rPr>
-              <a:t>週末編集室｜架空の企画</a:t>
+                <a:latin typeface="Shippori Mincho" pitchFamily="34" charset="0"/>
+                <a:ea typeface="Shippori Mincho" pitchFamily="34" charset="-122"/>
+                <a:cs typeface="Shippori Mincho" pitchFamily="34" charset="-120"/>
+              </a:rPr>
+              <a:t>読む・歩く・持ち寄る</a:t>
             </a:r>
             <a:endParaRPr lang="en-US" sz="2900" dirty="0"/>
           </a:p>
@@ -2230,9 +2493,9 @@
                 <a:solidFill>
                   <a:srgbClr val="665F58"/>
                 </a:solidFill>
-                <a:latin typeface="DejaVu Sans" pitchFamily="34" charset="0"/>
-                <a:ea typeface="DejaVu Sans" pitchFamily="34" charset="-122"/>
-                <a:cs typeface="DejaVu Sans" pitchFamily="34" charset="-120"/>
+                <a:latin typeface="Manrope" pitchFamily="34" charset="0"/>
+                <a:ea typeface="Manrope" pitchFamily="34" charset="-122"/>
+                <a:cs typeface="Manrope" pitchFamily="34" charset="-120"/>
               </a:rPr>
               <a:t>03 / 08</a:t>
             </a:r>
@@ -2242,14 +2505,39 @@
       </p:sp>
       <p:sp>
         <p:nvSpPr>
-          <p:cNvPr id="5" name="Text 3"/>
-          <p:cNvSpPr txBox="1"/>
-          <p:nvPr/>
-        </p:nvSpPr>
-        <p:spPr>
-          <a:xfrm>
-            <a:off x="1005840" y="1417320"/>
-            <a:ext cx="9875520" cy="1737360"/>
+          <p:cNvPr id="5" name="Shape 3"/>
+          <p:cNvSpPr/>
+          <p:nvPr/>
+        </p:nvSpPr>
+        <p:spPr>
+          <a:xfrm>
+            <a:off x="822960" y="1417320"/>
+            <a:ext cx="45720" cy="3520440"/>
+          </a:xfrm>
+          <a:prstGeom prst="rect">
+            <a:avLst/>
+          </a:prstGeom>
+          <a:solidFill>
+            <a:srgbClr val="C2410C"/>
+          </a:solidFill>
+          <a:ln w="12700">
+            <a:solidFill>
+              <a:srgbClr val="C2410C"/>
+            </a:solidFill>
+            <a:prstDash val="solid"/>
+          </a:ln>
+        </p:spPr>
+      </p:sp>
+      <p:sp>
+        <p:nvSpPr>
+          <p:cNvPr id="6" name="Text 4"/>
+          <p:cNvSpPr txBox="1"/>
+          <p:nvPr/>
+        </p:nvSpPr>
+        <p:spPr>
+          <a:xfrm>
+            <a:off x="987552" y="1417320"/>
+            <a:ext cx="2624328" cy="219456"/>
           </a:xfrm>
           <a:prstGeom prst="rect">
             <a:avLst/>
@@ -2267,47 +2555,115 @@
               <a:buNone/>
             </a:pPr>
             <a:r>
-              <a:rPr lang="en-US" sz="5200" b="1" dirty="0">
+              <a:rPr lang="en-US" sz="1000" b="1" dirty="0">
+                <a:solidFill>
+                  <a:srgbClr val="C2410C"/>
+                </a:solidFill>
+                <a:latin typeface="BIZ UDPGothic" pitchFamily="34" charset="0"/>
+                <a:ea typeface="BIZ UDPGothic" pitchFamily="34" charset="-122"/>
+                <a:cs typeface="BIZ UDPGothic" pitchFamily="34" charset="-120"/>
+              </a:rPr>
+              <a:t>体験の要点</a:t>
+            </a:r>
+            <a:endParaRPr lang="en-US" sz="1000" dirty="0"/>
+          </a:p>
+        </p:txBody>
+      </p:sp>
+      <p:sp>
+        <p:nvSpPr>
+          <p:cNvPr id="7" name="Text 5"/>
+          <p:cNvSpPr txBox="1"/>
+          <p:nvPr/>
+        </p:nvSpPr>
+        <p:spPr>
+          <a:xfrm>
+            <a:off x="987552" y="1746504"/>
+            <a:ext cx="2624328" cy="3191256"/>
+          </a:xfrm>
+          <a:prstGeom prst="rect">
+            <a:avLst/>
+          </a:prstGeom>
+          <a:noFill/>
+          <a:ln/>
+        </p:spPr>
+        <p:txBody>
+          <a:bodyPr wrap="square" lIns="254" tIns="254" rIns="254" bIns="254" rtlCol="0" anchor="ctr">
+            <a:normAutofit/>
+          </a:bodyPr>
+          <a:lstStyle/>
+          <a:p>
+            <a:pPr algn="l" indent="0" marL="0">
+              <a:buNone/>
+            </a:pPr>
+            <a:r>
+              <a:rPr lang="en-US" sz="1800" b="1" dirty="0">
                 <a:solidFill>
                   <a:srgbClr val="111111"/>
                 </a:solidFill>
-                <a:latin typeface="Noto Serif CJK JP" pitchFamily="34" charset="0"/>
-                <a:ea typeface="Noto Serif CJK JP" pitchFamily="34" charset="-122"/>
-                <a:cs typeface="Noto Serif CJK JP" pitchFamily="34" charset="-120"/>
-              </a:rPr>
-              <a:t>“読む。歩く。</a:t>
-            </a:r>
-            <a:endParaRPr lang="en-US" sz="5200" dirty="0"/>
+                <a:latin typeface="BIZ UDPGothic" pitchFamily="34" charset="0"/>
+                <a:ea typeface="BIZ UDPGothic" pitchFamily="34" charset="-122"/>
+                <a:cs typeface="BIZ UDPGothic" pitchFamily="34" charset="-120"/>
+              </a:rPr>
+              <a:t>三つの行為を</a:t>
+            </a:r>
+            <a:endParaRPr lang="en-US" sz="1800" dirty="0"/>
           </a:p>
           <a:p>
             <a:pPr algn="l" indent="0" marL="0">
               <a:buNone/>
             </a:pPr>
             <a:r>
-              <a:rPr lang="en-US" sz="5200" b="1" dirty="0">
+              <a:rPr lang="en-US" sz="1800" b="1" dirty="0">
                 <a:solidFill>
                   <a:srgbClr val="111111"/>
                 </a:solidFill>
-                <a:latin typeface="Noto Serif CJK JP" pitchFamily="34" charset="0"/>
-                <a:ea typeface="Noto Serif CJK JP" pitchFamily="34" charset="-122"/>
-                <a:cs typeface="Noto Serif CJK JP" pitchFamily="34" charset="-120"/>
-              </a:rPr>
-              <a:t>持ち寄る。”</a:t>
-            </a:r>
-            <a:endParaRPr lang="en-US" sz="5200" dirty="0"/>
-          </a:p>
-        </p:txBody>
-      </p:sp>
-      <p:sp>
-        <p:nvSpPr>
-          <p:cNvPr id="6" name="Text 4"/>
-          <p:cNvSpPr txBox="1"/>
-          <p:nvPr/>
-        </p:nvSpPr>
-        <p:spPr>
-          <a:xfrm>
-            <a:off x="1078992" y="2971800"/>
-            <a:ext cx="6126480" cy="658368"/>
+                <a:latin typeface="BIZ UDPGothic" pitchFamily="34" charset="0"/>
+                <a:ea typeface="BIZ UDPGothic" pitchFamily="34" charset="-122"/>
+                <a:cs typeface="BIZ UDPGothic" pitchFamily="34" charset="-120"/>
+              </a:rPr>
+              <a:t>一冊の編集につなぐ</a:t>
+            </a:r>
+            <a:endParaRPr lang="en-US" sz="1800" dirty="0"/>
+          </a:p>
+        </p:txBody>
+      </p:sp>
+      <p:sp>
+        <p:nvSpPr>
+          <p:cNvPr id="8" name="Shape 6"/>
+          <p:cNvSpPr/>
+          <p:nvPr/>
+        </p:nvSpPr>
+        <p:spPr>
+          <a:xfrm>
+            <a:off x="4069080" y="1417320"/>
+            <a:ext cx="7059168" cy="1039368"/>
+          </a:xfrm>
+          <a:prstGeom prst="rect">
+            <a:avLst>
+              <a:gd name="adj" fmla="val 1760"/>
+            </a:avLst>
+          </a:prstGeom>
+          <a:solidFill>
+            <a:srgbClr val="E9E0D1"/>
+          </a:solidFill>
+          <a:ln w="10160">
+            <a:solidFill>
+              <a:srgbClr val="D7CCB9"/>
+            </a:solidFill>
+            <a:prstDash val="solid"/>
+          </a:ln>
+        </p:spPr>
+      </p:sp>
+      <p:sp>
+        <p:nvSpPr>
+          <p:cNvPr id="9" name="Text 7"/>
+          <p:cNvSpPr txBox="1"/>
+          <p:nvPr/>
+        </p:nvSpPr>
+        <p:spPr>
+          <a:xfrm>
+            <a:off x="4270248" y="1417320"/>
+            <a:ext cx="457200" cy="1039368"/>
           </a:xfrm>
           <a:prstGeom prst="rect">
             <a:avLst/>
@@ -2325,17 +2681,276 @@
               <a:buNone/>
             </a:pPr>
             <a:r>
-              <a:rPr lang="en-US" sz="1800" dirty="0">
-                <a:solidFill>
-                  <a:srgbClr val="665F58"/>
-                </a:solidFill>
-                <a:latin typeface="Noto Sans CJK JP" pitchFamily="34" charset="0"/>
-                <a:ea typeface="Noto Sans CJK JP" pitchFamily="34" charset="-122"/>
-                <a:cs typeface="Noto Sans CJK JP" pitchFamily="34" charset="-120"/>
-              </a:rPr>
-              <a:t>これは誰かの引用ではなく、この架空企画の宣言。</a:t>
-            </a:r>
-            <a:endParaRPr lang="en-US" sz="1800" dirty="0"/>
+              <a:rPr lang="en-US" sz="1300" b="1" dirty="0">
+                <a:solidFill>
+                  <a:srgbClr val="C2410C"/>
+                </a:solidFill>
+                <a:latin typeface="BIZ UDPGothic" pitchFamily="34" charset="0"/>
+                <a:ea typeface="BIZ UDPGothic" pitchFamily="34" charset="-122"/>
+                <a:cs typeface="BIZ UDPGothic" pitchFamily="34" charset="-120"/>
+              </a:rPr>
+              <a:t>01</a:t>
+            </a:r>
+            <a:endParaRPr lang="en-US" sz="1300" dirty="0"/>
+          </a:p>
+        </p:txBody>
+      </p:sp>
+      <p:sp>
+        <p:nvSpPr>
+          <p:cNvPr id="10" name="Text 8"/>
+          <p:cNvSpPr txBox="1"/>
+          <p:nvPr/>
+        </p:nvSpPr>
+        <p:spPr>
+          <a:xfrm>
+            <a:off x="4855464" y="1581912"/>
+            <a:ext cx="6016752" cy="801624"/>
+          </a:xfrm>
+          <a:prstGeom prst="rect">
+            <a:avLst/>
+          </a:prstGeom>
+          <a:noFill/>
+          <a:ln/>
+        </p:spPr>
+        <p:txBody>
+          <a:bodyPr wrap="square" lIns="254" tIns="254" rIns="254" bIns="254" rtlCol="0" anchor="ctr">
+            <a:normAutofit/>
+          </a:bodyPr>
+          <a:lstStyle/>
+          <a:p>
+            <a:pPr algn="l" indent="0" marL="0">
+              <a:buNone/>
+            </a:pPr>
+            <a:r>
+              <a:rPr lang="en-US" sz="1620" dirty="0">
+                <a:solidFill>
+                  <a:srgbClr val="111111"/>
+                </a:solidFill>
+                <a:latin typeface="BIZ UDPGothic" pitchFamily="34" charset="0"/>
+                <a:ea typeface="BIZ UDPGothic" pitchFamily="34" charset="-122"/>
+                <a:cs typeface="BIZ UDPGothic" pitchFamily="34" charset="-120"/>
+              </a:rPr>
+              <a:t>読む｜気になる一冊を選ぶ</a:t>
+            </a:r>
+            <a:endParaRPr lang="en-US" sz="1620" dirty="0"/>
+          </a:p>
+        </p:txBody>
+      </p:sp>
+      <p:sp>
+        <p:nvSpPr>
+          <p:cNvPr id="11" name="Shape 9"/>
+          <p:cNvSpPr/>
+          <p:nvPr/>
+        </p:nvSpPr>
+        <p:spPr>
+          <a:xfrm>
+            <a:off x="4069080" y="2657856"/>
+            <a:ext cx="7059168" cy="1039368"/>
+          </a:xfrm>
+          <a:prstGeom prst="rect">
+            <a:avLst>
+              <a:gd name="adj" fmla="val 1760"/>
+            </a:avLst>
+          </a:prstGeom>
+          <a:solidFill>
+            <a:srgbClr val="FFFDF7"/>
+          </a:solidFill>
+          <a:ln w="10160">
+            <a:solidFill>
+              <a:srgbClr val="D7CCB9"/>
+            </a:solidFill>
+            <a:prstDash val="solid"/>
+          </a:ln>
+        </p:spPr>
+      </p:sp>
+      <p:sp>
+        <p:nvSpPr>
+          <p:cNvPr id="12" name="Text 10"/>
+          <p:cNvSpPr txBox="1"/>
+          <p:nvPr/>
+        </p:nvSpPr>
+        <p:spPr>
+          <a:xfrm>
+            <a:off x="4270248" y="2657856"/>
+            <a:ext cx="457200" cy="1039368"/>
+          </a:xfrm>
+          <a:prstGeom prst="rect">
+            <a:avLst/>
+          </a:prstGeom>
+          <a:noFill/>
+          <a:ln/>
+        </p:spPr>
+        <p:txBody>
+          <a:bodyPr wrap="square" lIns="254" tIns="254" rIns="254" bIns="254" rtlCol="0" anchor="ctr">
+            <a:normAutofit/>
+          </a:bodyPr>
+          <a:lstStyle/>
+          <a:p>
+            <a:pPr algn="l" indent="0" marL="0">
+              <a:buNone/>
+            </a:pPr>
+            <a:r>
+              <a:rPr lang="en-US" sz="1300" b="1" dirty="0">
+                <a:solidFill>
+                  <a:srgbClr val="C2410C"/>
+                </a:solidFill>
+                <a:latin typeface="BIZ UDPGothic" pitchFamily="34" charset="0"/>
+                <a:ea typeface="BIZ UDPGothic" pitchFamily="34" charset="-122"/>
+                <a:cs typeface="BIZ UDPGothic" pitchFamily="34" charset="-120"/>
+              </a:rPr>
+              <a:t>02</a:t>
+            </a:r>
+            <a:endParaRPr lang="en-US" sz="1300" dirty="0"/>
+          </a:p>
+        </p:txBody>
+      </p:sp>
+      <p:sp>
+        <p:nvSpPr>
+          <p:cNvPr id="13" name="Text 11"/>
+          <p:cNvSpPr txBox="1"/>
+          <p:nvPr/>
+        </p:nvSpPr>
+        <p:spPr>
+          <a:xfrm>
+            <a:off x="4855464" y="2822448"/>
+            <a:ext cx="6016752" cy="801624"/>
+          </a:xfrm>
+          <a:prstGeom prst="rect">
+            <a:avLst/>
+          </a:prstGeom>
+          <a:noFill/>
+          <a:ln/>
+        </p:spPr>
+        <p:txBody>
+          <a:bodyPr wrap="square" lIns="254" tIns="254" rIns="254" bIns="254" rtlCol="0" anchor="ctr">
+            <a:normAutofit/>
+          </a:bodyPr>
+          <a:lstStyle/>
+          <a:p>
+            <a:pPr algn="l" indent="0" marL="0">
+              <a:buNone/>
+            </a:pPr>
+            <a:r>
+              <a:rPr lang="en-US" sz="1620" dirty="0">
+                <a:solidFill>
+                  <a:srgbClr val="111111"/>
+                </a:solidFill>
+                <a:latin typeface="BIZ UDPGothic" pitchFamily="34" charset="0"/>
+                <a:ea typeface="BIZ UDPGothic" pitchFamily="34" charset="-122"/>
+                <a:cs typeface="BIZ UDPGothic" pitchFamily="34" charset="-120"/>
+              </a:rPr>
+              <a:t>歩く｜言葉につながる場所を探す</a:t>
+            </a:r>
+            <a:endParaRPr lang="en-US" sz="1620" dirty="0"/>
+          </a:p>
+        </p:txBody>
+      </p:sp>
+      <p:sp>
+        <p:nvSpPr>
+          <p:cNvPr id="14" name="Shape 12"/>
+          <p:cNvSpPr/>
+          <p:nvPr/>
+        </p:nvSpPr>
+        <p:spPr>
+          <a:xfrm>
+            <a:off x="4069080" y="3898392"/>
+            <a:ext cx="7059168" cy="1039368"/>
+          </a:xfrm>
+          <a:prstGeom prst="rect">
+            <a:avLst>
+              <a:gd name="adj" fmla="val 1760"/>
+            </a:avLst>
+          </a:prstGeom>
+          <a:solidFill>
+            <a:srgbClr val="FFFDF7"/>
+          </a:solidFill>
+          <a:ln w="10160">
+            <a:solidFill>
+              <a:srgbClr val="D7CCB9"/>
+            </a:solidFill>
+            <a:prstDash val="solid"/>
+          </a:ln>
+        </p:spPr>
+      </p:sp>
+      <p:sp>
+        <p:nvSpPr>
+          <p:cNvPr id="15" name="Text 13"/>
+          <p:cNvSpPr txBox="1"/>
+          <p:nvPr/>
+        </p:nvSpPr>
+        <p:spPr>
+          <a:xfrm>
+            <a:off x="4270248" y="3898392"/>
+            <a:ext cx="457200" cy="1039368"/>
+          </a:xfrm>
+          <a:prstGeom prst="rect">
+            <a:avLst/>
+          </a:prstGeom>
+          <a:noFill/>
+          <a:ln/>
+        </p:spPr>
+        <p:txBody>
+          <a:bodyPr wrap="square" lIns="254" tIns="254" rIns="254" bIns="254" rtlCol="0" anchor="ctr">
+            <a:normAutofit/>
+          </a:bodyPr>
+          <a:lstStyle/>
+          <a:p>
+            <a:pPr algn="l" indent="0" marL="0">
+              <a:buNone/>
+            </a:pPr>
+            <a:r>
+              <a:rPr lang="en-US" sz="1300" b="1" dirty="0">
+                <a:solidFill>
+                  <a:srgbClr val="C2410C"/>
+                </a:solidFill>
+                <a:latin typeface="BIZ UDPGothic" pitchFamily="34" charset="0"/>
+                <a:ea typeface="BIZ UDPGothic" pitchFamily="34" charset="-122"/>
+                <a:cs typeface="BIZ UDPGothic" pitchFamily="34" charset="-120"/>
+              </a:rPr>
+              <a:t>03</a:t>
+            </a:r>
+            <a:endParaRPr lang="en-US" sz="1300" dirty="0"/>
+          </a:p>
+        </p:txBody>
+      </p:sp>
+      <p:sp>
+        <p:nvSpPr>
+          <p:cNvPr id="16" name="Text 14"/>
+          <p:cNvSpPr txBox="1"/>
+          <p:nvPr/>
+        </p:nvSpPr>
+        <p:spPr>
+          <a:xfrm>
+            <a:off x="4855464" y="4062984"/>
+            <a:ext cx="6016752" cy="801624"/>
+          </a:xfrm>
+          <a:prstGeom prst="rect">
+            <a:avLst/>
+          </a:prstGeom>
+          <a:noFill/>
+          <a:ln/>
+        </p:spPr>
+        <p:txBody>
+          <a:bodyPr wrap="square" lIns="254" tIns="254" rIns="254" bIns="254" rtlCol="0" anchor="ctr">
+            <a:normAutofit/>
+          </a:bodyPr>
+          <a:lstStyle/>
+          <a:p>
+            <a:pPr algn="l" indent="0" marL="0">
+              <a:buNone/>
+            </a:pPr>
+            <a:r>
+              <a:rPr lang="en-US" sz="1620" dirty="0">
+                <a:solidFill>
+                  <a:srgbClr val="111111"/>
+                </a:solidFill>
+                <a:latin typeface="BIZ UDPGothic" pitchFamily="34" charset="0"/>
+                <a:ea typeface="BIZ UDPGothic" pitchFamily="34" charset="-122"/>
+                <a:cs typeface="BIZ UDPGothic" pitchFamily="34" charset="-120"/>
+              </a:rPr>
+              <a:t>持ち寄る｜写真と短文を共有する</a:t>
+            </a:r>
+            <a:endParaRPr lang="en-US" sz="1620" dirty="0"/>
           </a:p>
         </p:txBody>
       </p:sp>
@@ -2402,9 +3017,9 @@
                 <a:solidFill>
                   <a:srgbClr val="111111"/>
                 </a:solidFill>
-                <a:latin typeface="Noto Serif CJK JP" pitchFamily="34" charset="0"/>
-                <a:ea typeface="Noto Serif CJK JP" pitchFamily="34" charset="-122"/>
-                <a:cs typeface="Noto Serif CJK JP" pitchFamily="34" charset="-120"/>
+                <a:latin typeface="Shippori Mincho" pitchFamily="34" charset="0"/>
+                <a:ea typeface="Shippori Mincho" pitchFamily="34" charset="-122"/>
+                <a:cs typeface="Shippori Mincho" pitchFamily="34" charset="-120"/>
               </a:rPr>
               <a:t>棚の読書、編集台の対話</a:t>
             </a:r>
@@ -2464,9 +3079,9 @@
                 <a:solidFill>
                   <a:srgbClr val="665F58"/>
                 </a:solidFill>
-                <a:latin typeface="DejaVu Sans" pitchFamily="34" charset="0"/>
-                <a:ea typeface="DejaVu Sans" pitchFamily="34" charset="-122"/>
-                <a:cs typeface="DejaVu Sans" pitchFamily="34" charset="-120"/>
+                <a:latin typeface="Manrope" pitchFamily="34" charset="0"/>
+                <a:ea typeface="Manrope" pitchFamily="34" charset="-122"/>
+                <a:cs typeface="Manrope" pitchFamily="34" charset="-120"/>
               </a:rPr>
               <a:t>04 / 08</a:t>
             </a:r>
@@ -2483,11 +3098,11 @@
         <p:spPr>
           <a:xfrm>
             <a:off x="868680" y="1481328"/>
-            <a:ext cx="4892040" cy="3794760"/>
+            <a:ext cx="4892040" cy="3429000"/>
           </a:xfrm>
           <a:prstGeom prst="rect">
             <a:avLst>
-              <a:gd name="adj" fmla="val 482"/>
+              <a:gd name="adj" fmla="val 533"/>
             </a:avLst>
           </a:prstGeom>
           <a:solidFill>
@@ -2510,11 +3125,11 @@
         <p:spPr>
           <a:xfrm>
             <a:off x="6382512" y="1481328"/>
-            <a:ext cx="4892040" cy="3794760"/>
+            <a:ext cx="4892040" cy="3429000"/>
           </a:xfrm>
           <a:prstGeom prst="rect">
             <a:avLst>
-              <a:gd name="adj" fmla="val 482"/>
+              <a:gd name="adj" fmla="val 533"/>
             </a:avLst>
           </a:prstGeom>
           <a:solidFill>
@@ -2559,9 +3174,9 @@
                 <a:solidFill>
                   <a:srgbClr val="665F58"/>
                 </a:solidFill>
-                <a:latin typeface="Noto Sans CJK JP" pitchFamily="34" charset="0"/>
-                <a:ea typeface="Noto Sans CJK JP" pitchFamily="34" charset="-122"/>
-                <a:cs typeface="Noto Sans CJK JP" pitchFamily="34" charset="-120"/>
+                <a:latin typeface="BIZ UDPGothic" pitchFamily="34" charset="0"/>
+                <a:ea typeface="BIZ UDPGothic" pitchFamily="34" charset="-122"/>
+                <a:cs typeface="BIZ UDPGothic" pitchFamily="34" charset="-120"/>
               </a:rPr>
               <a:t>いつもの読書</a:t>
             </a:r>
@@ -2600,9 +3215,9 @@
                 <a:solidFill>
                   <a:srgbClr val="C2410C"/>
                 </a:solidFill>
-                <a:latin typeface="Noto Sans CJK JP" pitchFamily="34" charset="0"/>
-                <a:ea typeface="Noto Sans CJK JP" pitchFamily="34" charset="-122"/>
-                <a:cs typeface="Noto Sans CJK JP" pitchFamily="34" charset="-120"/>
+                <a:latin typeface="BIZ UDPGothic" pitchFamily="34" charset="0"/>
+                <a:ea typeface="BIZ UDPGothic" pitchFamily="34" charset="-122"/>
+                <a:cs typeface="BIZ UDPGothic" pitchFamily="34" charset="-120"/>
               </a:rPr>
               <a:t>編集室の読書</a:t>
             </a:r>
@@ -2613,132 +3228,584 @@
       <p:sp>
         <p:nvSpPr>
           <p:cNvPr id="9" name="Text 7"/>
+          <p:cNvSpPr txBox="1"/>
+          <p:nvPr/>
+        </p:nvSpPr>
+        <p:spPr>
+          <a:xfrm>
+            <a:off x="1161288" y="2231136"/>
+            <a:ext cx="4306824" cy="201168"/>
+          </a:xfrm>
+          <a:prstGeom prst="rect">
+            <a:avLst/>
+          </a:prstGeom>
+          <a:noFill/>
+          <a:ln/>
+        </p:spPr>
+        <p:txBody>
+          <a:bodyPr wrap="square" lIns="254" tIns="254" rIns="254" bIns="254" rtlCol="0" anchor="ctr">
+            <a:normAutofit/>
+          </a:bodyPr>
+          <a:lstStyle/>
+          <a:p>
+            <a:pPr algn="l" indent="0" marL="0">
+              <a:buNone/>
+            </a:pPr>
+            <a:r>
+              <a:rPr lang="en-US" sz="1150" dirty="0">
+                <a:solidFill>
+                  <a:srgbClr val="665F58"/>
+                </a:solidFill>
+                <a:latin typeface="BIZ UDPGothic" pitchFamily="34" charset="0"/>
+                <a:ea typeface="BIZ UDPGothic" pitchFamily="34" charset="-122"/>
+                <a:cs typeface="BIZ UDPGothic" pitchFamily="34" charset="-120"/>
+              </a:rPr>
+              <a:t>本との関わり</a:t>
+            </a:r>
+            <a:endParaRPr lang="en-US" sz="1150" dirty="0"/>
+          </a:p>
+        </p:txBody>
+      </p:sp>
+      <p:sp>
+        <p:nvSpPr>
+          <p:cNvPr id="10" name="Text 8"/>
+          <p:cNvSpPr txBox="1"/>
+          <p:nvPr/>
+        </p:nvSpPr>
+        <p:spPr>
+          <a:xfrm>
+            <a:off x="1161288" y="2478024"/>
+            <a:ext cx="4306824" cy="448056"/>
+          </a:xfrm>
+          <a:prstGeom prst="rect">
+            <a:avLst/>
+          </a:prstGeom>
+          <a:noFill/>
+          <a:ln/>
+        </p:spPr>
+        <p:txBody>
+          <a:bodyPr wrap="square" lIns="254" tIns="254" rIns="254" bIns="254" rtlCol="0" anchor="ctr">
+            <a:normAutofit/>
+          </a:bodyPr>
+          <a:lstStyle/>
+          <a:p>
+            <a:pPr algn="l" indent="0" marL="0">
+              <a:buNone/>
+            </a:pPr>
+            <a:r>
+              <a:rPr lang="en-US" sz="1800" dirty="0">
+                <a:solidFill>
+                  <a:srgbClr val="111111"/>
+                </a:solidFill>
+                <a:latin typeface="BIZ UDPGothic" pitchFamily="34" charset="0"/>
+                <a:ea typeface="BIZ UDPGothic" pitchFamily="34" charset="-122"/>
+                <a:cs typeface="BIZ UDPGothic" pitchFamily="34" charset="-120"/>
+              </a:rPr>
+              <a:t>一人で本を選び、読む</a:t>
+            </a:r>
+            <a:endParaRPr lang="en-US" sz="1800" dirty="0"/>
+          </a:p>
+        </p:txBody>
+      </p:sp>
+      <p:sp>
+        <p:nvSpPr>
+          <p:cNvPr id="11" name="Shape 9"/>
           <p:cNvSpPr/>
           <p:nvPr/>
         </p:nvSpPr>
         <p:spPr>
           <a:xfrm>
-            <a:off x="1179576" y="2304288"/>
-            <a:ext cx="4251960" cy="2560320"/>
-          </a:xfrm>
-          <a:prstGeom prst="rect">
-            <a:avLst/>
-          </a:prstGeom>
-          <a:noFill/>
-          <a:ln/>
-        </p:spPr>
-        <p:txBody>
-          <a:bodyPr wrap="square" lIns="1016" tIns="1016" rIns="1016" bIns="1016" rtlCol="0" anchor="ctr">
-            <a:normAutofit/>
-          </a:bodyPr>
-          <a:lstStyle/>
-          <a:p>
-            <a:r>
-              <a:rPr lang="en-US" sz="1520" dirty="0">
+            <a:off x="1161288" y="3035808"/>
+            <a:ext cx="4306824" cy="0"/>
+          </a:xfrm>
+          <a:prstGeom prst="line">
+            <a:avLst/>
+          </a:prstGeom>
+          <a:noFill/>
+          <a:ln w="7620">
+            <a:solidFill>
+              <a:srgbClr val="D7CCB9"/>
+            </a:solidFill>
+            <a:prstDash val="solid"/>
+          </a:ln>
+        </p:spPr>
+      </p:sp>
+      <p:sp>
+        <p:nvSpPr>
+          <p:cNvPr id="12" name="Text 10"/>
+          <p:cNvSpPr txBox="1"/>
+          <p:nvPr/>
+        </p:nvSpPr>
+        <p:spPr>
+          <a:xfrm>
+            <a:off x="1161288" y="3127248"/>
+            <a:ext cx="4306824" cy="201168"/>
+          </a:xfrm>
+          <a:prstGeom prst="rect">
+            <a:avLst/>
+          </a:prstGeom>
+          <a:noFill/>
+          <a:ln/>
+        </p:spPr>
+        <p:txBody>
+          <a:bodyPr wrap="square" lIns="254" tIns="254" rIns="254" bIns="254" rtlCol="0" anchor="ctr">
+            <a:normAutofit/>
+          </a:bodyPr>
+          <a:lstStyle/>
+          <a:p>
+            <a:pPr algn="l" indent="0" marL="0">
+              <a:buNone/>
+            </a:pPr>
+            <a:r>
+              <a:rPr lang="en-US" sz="1150" dirty="0">
+                <a:solidFill>
+                  <a:srgbClr val="665F58"/>
+                </a:solidFill>
+                <a:latin typeface="BIZ UDPGothic" pitchFamily="34" charset="0"/>
+                <a:ea typeface="BIZ UDPGothic" pitchFamily="34" charset="-122"/>
+                <a:cs typeface="BIZ UDPGothic" pitchFamily="34" charset="-120"/>
+              </a:rPr>
+              <a:t>感想と体験</a:t>
+            </a:r>
+            <a:endParaRPr lang="en-US" sz="1150" dirty="0"/>
+          </a:p>
+        </p:txBody>
+      </p:sp>
+      <p:sp>
+        <p:nvSpPr>
+          <p:cNvPr id="13" name="Text 11"/>
+          <p:cNvSpPr txBox="1"/>
+          <p:nvPr/>
+        </p:nvSpPr>
+        <p:spPr>
+          <a:xfrm>
+            <a:off x="1161288" y="3374136"/>
+            <a:ext cx="4306824" cy="448056"/>
+          </a:xfrm>
+          <a:prstGeom prst="rect">
+            <a:avLst/>
+          </a:prstGeom>
+          <a:noFill/>
+          <a:ln/>
+        </p:spPr>
+        <p:txBody>
+          <a:bodyPr wrap="square" lIns="254" tIns="254" rIns="254" bIns="254" rtlCol="0" anchor="ctr">
+            <a:normAutofit/>
+          </a:bodyPr>
+          <a:lstStyle/>
+          <a:p>
+            <a:pPr algn="l" indent="0" marL="0">
+              <a:buNone/>
+            </a:pPr>
+            <a:r>
+              <a:rPr lang="en-US" sz="1800" dirty="0">
                 <a:solidFill>
                   <a:srgbClr val="111111"/>
                 </a:solidFill>
-                <a:latin typeface="Noto Sans CJK JP" pitchFamily="34" charset="0"/>
-                <a:ea typeface="Noto Sans CJK JP" pitchFamily="34" charset="-122"/>
-                <a:cs typeface="Noto Sans CJK JP" pitchFamily="34" charset="-120"/>
-              </a:rPr>
-              <a:t>選書をひとりで眺める</a:t>
-            </a:r>
-            <a:endParaRPr lang="en-US" sz="1520" dirty="0"/>
-          </a:p>
-          <a:p>
-            <a:r>
-              <a:rPr lang="en-US" sz="1520" dirty="0">
+                <a:latin typeface="BIZ UDPGothic" pitchFamily="34" charset="0"/>
+                <a:ea typeface="BIZ UDPGothic" pitchFamily="34" charset="-122"/>
+                <a:cs typeface="BIZ UDPGothic" pitchFamily="34" charset="-120"/>
+              </a:rPr>
+              <a:t>感想は自分の中で整理する</a:t>
+            </a:r>
+            <a:endParaRPr lang="en-US" sz="1800" dirty="0"/>
+          </a:p>
+        </p:txBody>
+      </p:sp>
+      <p:sp>
+        <p:nvSpPr>
+          <p:cNvPr id="14" name="Shape 12"/>
+          <p:cNvSpPr/>
+          <p:nvPr/>
+        </p:nvSpPr>
+        <p:spPr>
+          <a:xfrm>
+            <a:off x="1161288" y="3931920"/>
+            <a:ext cx="4306824" cy="0"/>
+          </a:xfrm>
+          <a:prstGeom prst="line">
+            <a:avLst/>
+          </a:prstGeom>
+          <a:noFill/>
+          <a:ln w="7620">
+            <a:solidFill>
+              <a:srgbClr val="D7CCB9"/>
+            </a:solidFill>
+            <a:prstDash val="solid"/>
+          </a:ln>
+        </p:spPr>
+      </p:sp>
+      <p:sp>
+        <p:nvSpPr>
+          <p:cNvPr id="15" name="Text 13"/>
+          <p:cNvSpPr txBox="1"/>
+          <p:nvPr/>
+        </p:nvSpPr>
+        <p:spPr>
+          <a:xfrm>
+            <a:off x="1161288" y="4023360"/>
+            <a:ext cx="4306824" cy="201168"/>
+          </a:xfrm>
+          <a:prstGeom prst="rect">
+            <a:avLst/>
+          </a:prstGeom>
+          <a:noFill/>
+          <a:ln/>
+        </p:spPr>
+        <p:txBody>
+          <a:bodyPr wrap="square" lIns="254" tIns="254" rIns="254" bIns="254" rtlCol="0" anchor="ctr">
+            <a:normAutofit/>
+          </a:bodyPr>
+          <a:lstStyle/>
+          <a:p>
+            <a:pPr algn="l" indent="0" marL="0">
+              <a:buNone/>
+            </a:pPr>
+            <a:r>
+              <a:rPr lang="en-US" sz="1150" dirty="0">
+                <a:solidFill>
+                  <a:srgbClr val="665F58"/>
+                </a:solidFill>
+                <a:latin typeface="BIZ UDPGothic" pitchFamily="34" charset="0"/>
+                <a:ea typeface="BIZ UDPGothic" pitchFamily="34" charset="-122"/>
+                <a:cs typeface="BIZ UDPGothic" pitchFamily="34" charset="-120"/>
+              </a:rPr>
+              <a:t>持ち帰るもの</a:t>
+            </a:r>
+            <a:endParaRPr lang="en-US" sz="1150" dirty="0"/>
+          </a:p>
+        </p:txBody>
+      </p:sp>
+      <p:sp>
+        <p:nvSpPr>
+          <p:cNvPr id="16" name="Text 14"/>
+          <p:cNvSpPr txBox="1"/>
+          <p:nvPr/>
+        </p:nvSpPr>
+        <p:spPr>
+          <a:xfrm>
+            <a:off x="1161288" y="4270248"/>
+            <a:ext cx="4306824" cy="448056"/>
+          </a:xfrm>
+          <a:prstGeom prst="rect">
+            <a:avLst/>
+          </a:prstGeom>
+          <a:noFill/>
+          <a:ln/>
+        </p:spPr>
+        <p:txBody>
+          <a:bodyPr wrap="square" lIns="254" tIns="254" rIns="254" bIns="254" rtlCol="0" anchor="ctr">
+            <a:normAutofit/>
+          </a:bodyPr>
+          <a:lstStyle/>
+          <a:p>
+            <a:pPr algn="l" indent="0" marL="0">
+              <a:buNone/>
+            </a:pPr>
+            <a:r>
+              <a:rPr lang="en-US" sz="1800" dirty="0">
                 <a:solidFill>
                   <a:srgbClr val="111111"/>
                 </a:solidFill>
-                <a:latin typeface="Noto Sans CJK JP" pitchFamily="34" charset="0"/>
-                <a:ea typeface="Noto Sans CJK JP" pitchFamily="34" charset="-122"/>
-                <a:cs typeface="Noto Sans CJK JP" pitchFamily="34" charset="-120"/>
-              </a:rPr>
-              <a:t>読んだ感想は持ち帰る</a:t>
-            </a:r>
-            <a:endParaRPr lang="en-US" sz="1520" dirty="0"/>
-          </a:p>
-          <a:p>
-            <a:r>
-              <a:rPr lang="en-US" sz="1520" dirty="0">
+                <a:latin typeface="BIZ UDPGothic" pitchFamily="34" charset="0"/>
+                <a:ea typeface="BIZ UDPGothic" pitchFamily="34" charset="-122"/>
+                <a:cs typeface="BIZ UDPGothic" pitchFamily="34" charset="-120"/>
+              </a:rPr>
+              <a:t>街での体験とは別々に持ち帰る</a:t>
+            </a:r>
+            <a:endParaRPr lang="en-US" sz="1800" dirty="0"/>
+          </a:p>
+        </p:txBody>
+      </p:sp>
+      <p:sp>
+        <p:nvSpPr>
+          <p:cNvPr id="17" name="Text 15"/>
+          <p:cNvSpPr txBox="1"/>
+          <p:nvPr/>
+        </p:nvSpPr>
+        <p:spPr>
+          <a:xfrm>
+            <a:off x="6675120" y="2231136"/>
+            <a:ext cx="4306824" cy="201168"/>
+          </a:xfrm>
+          <a:prstGeom prst="rect">
+            <a:avLst/>
+          </a:prstGeom>
+          <a:noFill/>
+          <a:ln/>
+        </p:spPr>
+        <p:txBody>
+          <a:bodyPr wrap="square" lIns="254" tIns="254" rIns="254" bIns="254" rtlCol="0" anchor="ctr">
+            <a:normAutofit/>
+          </a:bodyPr>
+          <a:lstStyle/>
+          <a:p>
+            <a:pPr algn="l" indent="0" marL="0">
+              <a:buNone/>
+            </a:pPr>
+            <a:r>
+              <a:rPr lang="en-US" sz="1150" dirty="0">
+                <a:solidFill>
+                  <a:srgbClr val="665F58"/>
+                </a:solidFill>
+                <a:latin typeface="BIZ UDPGothic" pitchFamily="34" charset="0"/>
+                <a:ea typeface="BIZ UDPGothic" pitchFamily="34" charset="-122"/>
+                <a:cs typeface="BIZ UDPGothic" pitchFamily="34" charset="-120"/>
+              </a:rPr>
+              <a:t>本との関わり</a:t>
+            </a:r>
+            <a:endParaRPr lang="en-US" sz="1150" dirty="0"/>
+          </a:p>
+        </p:txBody>
+      </p:sp>
+      <p:sp>
+        <p:nvSpPr>
+          <p:cNvPr id="18" name="Text 16"/>
+          <p:cNvSpPr txBox="1"/>
+          <p:nvPr/>
+        </p:nvSpPr>
+        <p:spPr>
+          <a:xfrm>
+            <a:off x="6675120" y="2478024"/>
+            <a:ext cx="4306824" cy="448056"/>
+          </a:xfrm>
+          <a:prstGeom prst="rect">
+            <a:avLst/>
+          </a:prstGeom>
+          <a:noFill/>
+          <a:ln/>
+        </p:spPr>
+        <p:txBody>
+          <a:bodyPr wrap="square" lIns="254" tIns="254" rIns="254" bIns="254" rtlCol="0" anchor="ctr">
+            <a:normAutofit/>
+          </a:bodyPr>
+          <a:lstStyle/>
+          <a:p>
+            <a:pPr algn="l" indent="0" marL="0">
+              <a:buNone/>
+            </a:pPr>
+            <a:r>
+              <a:rPr lang="en-US" sz="1800" dirty="0">
                 <a:solidFill>
                   <a:srgbClr val="111111"/>
                 </a:solidFill>
-                <a:latin typeface="Noto Sans CJK JP" pitchFamily="34" charset="0"/>
-                <a:ea typeface="Noto Sans CJK JP" pitchFamily="34" charset="-122"/>
-                <a:cs typeface="Noto Sans CJK JP" pitchFamily="34" charset="-120"/>
-              </a:rPr>
-              <a:t>店の外とはつながらない</a:t>
-            </a:r>
-            <a:endParaRPr lang="en-US" sz="1520" dirty="0"/>
-          </a:p>
-        </p:txBody>
-      </p:sp>
-      <p:sp>
-        <p:nvSpPr>
-          <p:cNvPr id="10" name="Text 8"/>
+                <a:latin typeface="BIZ UDPGothic" pitchFamily="34" charset="0"/>
+                <a:ea typeface="BIZ UDPGothic" pitchFamily="34" charset="-122"/>
+                <a:cs typeface="BIZ UDPGothic" pitchFamily="34" charset="-120"/>
+              </a:rPr>
+              <a:t>一冊と言葉を紹介し合う</a:t>
+            </a:r>
+            <a:endParaRPr lang="en-US" sz="1800" dirty="0"/>
+          </a:p>
+        </p:txBody>
+      </p:sp>
+      <p:sp>
+        <p:nvSpPr>
+          <p:cNvPr id="19" name="Shape 17"/>
           <p:cNvSpPr/>
           <p:nvPr/>
         </p:nvSpPr>
         <p:spPr>
           <a:xfrm>
-            <a:off x="6693408" y="2304288"/>
-            <a:ext cx="4251960" cy="2560320"/>
-          </a:xfrm>
-          <a:prstGeom prst="rect">
-            <a:avLst/>
-          </a:prstGeom>
-          <a:noFill/>
-          <a:ln/>
-        </p:spPr>
-        <p:txBody>
-          <a:bodyPr wrap="square" lIns="1016" tIns="1016" rIns="1016" bIns="1016" rtlCol="0" anchor="ctr">
-            <a:normAutofit/>
-          </a:bodyPr>
-          <a:lstStyle/>
-          <a:p>
-            <a:r>
-              <a:rPr lang="en-US" sz="1520" dirty="0">
+            <a:off x="6675120" y="3035808"/>
+            <a:ext cx="4306824" cy="0"/>
+          </a:xfrm>
+          <a:prstGeom prst="line">
+            <a:avLst/>
+          </a:prstGeom>
+          <a:noFill/>
+          <a:ln w="7620">
+            <a:solidFill>
+              <a:srgbClr val="D7CCB9"/>
+            </a:solidFill>
+            <a:prstDash val="solid"/>
+          </a:ln>
+        </p:spPr>
+      </p:sp>
+      <p:sp>
+        <p:nvSpPr>
+          <p:cNvPr id="20" name="Text 18"/>
+          <p:cNvSpPr txBox="1"/>
+          <p:nvPr/>
+        </p:nvSpPr>
+        <p:spPr>
+          <a:xfrm>
+            <a:off x="6675120" y="3127248"/>
+            <a:ext cx="4306824" cy="201168"/>
+          </a:xfrm>
+          <a:prstGeom prst="rect">
+            <a:avLst/>
+          </a:prstGeom>
+          <a:noFill/>
+          <a:ln/>
+        </p:spPr>
+        <p:txBody>
+          <a:bodyPr wrap="square" lIns="254" tIns="254" rIns="254" bIns="254" rtlCol="0" anchor="ctr">
+            <a:normAutofit/>
+          </a:bodyPr>
+          <a:lstStyle/>
+          <a:p>
+            <a:pPr algn="l" indent="0" marL="0">
+              <a:buNone/>
+            </a:pPr>
+            <a:r>
+              <a:rPr lang="en-US" sz="1150" dirty="0">
+                <a:solidFill>
+                  <a:srgbClr val="665F58"/>
+                </a:solidFill>
+                <a:latin typeface="BIZ UDPGothic" pitchFamily="34" charset="0"/>
+                <a:ea typeface="BIZ UDPGothic" pitchFamily="34" charset="-122"/>
+                <a:cs typeface="BIZ UDPGothic" pitchFamily="34" charset="-120"/>
+              </a:rPr>
+              <a:t>感想と体験</a:t>
+            </a:r>
+            <a:endParaRPr lang="en-US" sz="1150" dirty="0"/>
+          </a:p>
+        </p:txBody>
+      </p:sp>
+      <p:sp>
+        <p:nvSpPr>
+          <p:cNvPr id="21" name="Text 19"/>
+          <p:cNvSpPr txBox="1"/>
+          <p:nvPr/>
+        </p:nvSpPr>
+        <p:spPr>
+          <a:xfrm>
+            <a:off x="6675120" y="3374136"/>
+            <a:ext cx="4306824" cy="448056"/>
+          </a:xfrm>
+          <a:prstGeom prst="rect">
+            <a:avLst/>
+          </a:prstGeom>
+          <a:noFill/>
+          <a:ln/>
+        </p:spPr>
+        <p:txBody>
+          <a:bodyPr wrap="square" lIns="254" tIns="254" rIns="254" bIns="254" rtlCol="0" anchor="ctr">
+            <a:normAutofit/>
+          </a:bodyPr>
+          <a:lstStyle/>
+          <a:p>
+            <a:pPr algn="l" indent="0" marL="0">
+              <a:buNone/>
+            </a:pPr>
+            <a:r>
+              <a:rPr lang="en-US" sz="1800" dirty="0">
                 <a:solidFill>
                   <a:srgbClr val="111111"/>
                 </a:solidFill>
-                <a:latin typeface="Noto Sans CJK JP" pitchFamily="34" charset="0"/>
-                <a:ea typeface="Noto Sans CJK JP" pitchFamily="34" charset="-122"/>
-                <a:cs typeface="Noto Sans CJK JP" pitchFamily="34" charset="-120"/>
-              </a:rPr>
-              <a:t>気になる一冊を紹介する</a:t>
-            </a:r>
-            <a:endParaRPr lang="en-US" sz="1520" dirty="0"/>
-          </a:p>
-          <a:p>
-            <a:r>
-              <a:rPr lang="en-US" sz="1520" dirty="0">
+                <a:latin typeface="BIZ UDPGothic" pitchFamily="34" charset="0"/>
+                <a:ea typeface="BIZ UDPGothic" pitchFamily="34" charset="-122"/>
+                <a:cs typeface="BIZ UDPGothic" pitchFamily="34" charset="-120"/>
+              </a:rPr>
+              <a:t>街の写真と短文を持ち寄る</a:t>
+            </a:r>
+            <a:endParaRPr lang="en-US" sz="1800" dirty="0"/>
+          </a:p>
+        </p:txBody>
+      </p:sp>
+      <p:sp>
+        <p:nvSpPr>
+          <p:cNvPr id="22" name="Shape 20"/>
+          <p:cNvSpPr/>
+          <p:nvPr/>
+        </p:nvSpPr>
+        <p:spPr>
+          <a:xfrm>
+            <a:off x="6675120" y="3931920"/>
+            <a:ext cx="4306824" cy="0"/>
+          </a:xfrm>
+          <a:prstGeom prst="line">
+            <a:avLst/>
+          </a:prstGeom>
+          <a:noFill/>
+          <a:ln w="7620">
+            <a:solidFill>
+              <a:srgbClr val="D7CCB9"/>
+            </a:solidFill>
+            <a:prstDash val="solid"/>
+          </a:ln>
+        </p:spPr>
+      </p:sp>
+      <p:sp>
+        <p:nvSpPr>
+          <p:cNvPr id="23" name="Text 21"/>
+          <p:cNvSpPr txBox="1"/>
+          <p:nvPr/>
+        </p:nvSpPr>
+        <p:spPr>
+          <a:xfrm>
+            <a:off x="6675120" y="4023360"/>
+            <a:ext cx="4306824" cy="201168"/>
+          </a:xfrm>
+          <a:prstGeom prst="rect">
+            <a:avLst/>
+          </a:prstGeom>
+          <a:noFill/>
+          <a:ln/>
+        </p:spPr>
+        <p:txBody>
+          <a:bodyPr wrap="square" lIns="254" tIns="254" rIns="254" bIns="254" rtlCol="0" anchor="ctr">
+            <a:normAutofit/>
+          </a:bodyPr>
+          <a:lstStyle/>
+          <a:p>
+            <a:pPr algn="l" indent="0" marL="0">
+              <a:buNone/>
+            </a:pPr>
+            <a:r>
+              <a:rPr lang="en-US" sz="1150" dirty="0">
+                <a:solidFill>
+                  <a:srgbClr val="665F58"/>
+                </a:solidFill>
+                <a:latin typeface="BIZ UDPGothic" pitchFamily="34" charset="0"/>
+                <a:ea typeface="BIZ UDPGothic" pitchFamily="34" charset="-122"/>
+                <a:cs typeface="BIZ UDPGothic" pitchFamily="34" charset="-120"/>
+              </a:rPr>
+              <a:t>持ち帰るもの</a:t>
+            </a:r>
+            <a:endParaRPr lang="en-US" sz="1150" dirty="0"/>
+          </a:p>
+        </p:txBody>
+      </p:sp>
+      <p:sp>
+        <p:nvSpPr>
+          <p:cNvPr id="24" name="Text 22"/>
+          <p:cNvSpPr txBox="1"/>
+          <p:nvPr/>
+        </p:nvSpPr>
+        <p:spPr>
+          <a:xfrm>
+            <a:off x="6675120" y="4270248"/>
+            <a:ext cx="4306824" cy="448056"/>
+          </a:xfrm>
+          <a:prstGeom prst="rect">
+            <a:avLst/>
+          </a:prstGeom>
+          <a:noFill/>
+          <a:ln/>
+        </p:spPr>
+        <p:txBody>
+          <a:bodyPr wrap="square" lIns="254" tIns="254" rIns="254" bIns="254" rtlCol="0" anchor="ctr">
+            <a:normAutofit/>
+          </a:bodyPr>
+          <a:lstStyle/>
+          <a:p>
+            <a:pPr algn="l" indent="0" marL="0">
+              <a:buNone/>
+            </a:pPr>
+            <a:r>
+              <a:rPr lang="en-US" sz="1800" dirty="0">
                 <a:solidFill>
                   <a:srgbClr val="111111"/>
                 </a:solidFill>
-                <a:latin typeface="Noto Sans CJK JP" pitchFamily="34" charset="0"/>
-                <a:ea typeface="Noto Sans CJK JP" pitchFamily="34" charset="-122"/>
-                <a:cs typeface="Noto Sans CJK JP" pitchFamily="34" charset="-120"/>
-              </a:rPr>
-              <a:t>街で見つけた断片を持ち寄る</a:t>
-            </a:r>
-            <a:endParaRPr lang="en-US" sz="1520" dirty="0"/>
-          </a:p>
-          <a:p>
-            <a:r>
-              <a:rPr lang="en-US" sz="1520" dirty="0">
-                <a:solidFill>
-                  <a:srgbClr val="111111"/>
-                </a:solidFill>
-                <a:latin typeface="Noto Sans CJK JP" pitchFamily="34" charset="0"/>
-                <a:ea typeface="Noto Sans CJK JP" pitchFamily="34" charset="-122"/>
-                <a:cs typeface="Noto Sans CJK JP" pitchFamily="34" charset="-120"/>
-              </a:rPr>
-              <a:t>小さな冊子を一緒につくる</a:t>
-            </a:r>
-            <a:endParaRPr lang="en-US" sz="1520" dirty="0"/>
+                <a:latin typeface="BIZ UDPGothic" pitchFamily="34" charset="0"/>
+                <a:ea typeface="BIZ UDPGothic" pitchFamily="34" charset="-122"/>
+                <a:cs typeface="BIZ UDPGothic" pitchFamily="34" charset="-120"/>
+              </a:rPr>
+              <a:t>一緒に編集して小冊子に残す</a:t>
+            </a:r>
+            <a:endParaRPr lang="en-US" sz="1800" dirty="0"/>
           </a:p>
         </p:txBody>
       </p:sp>
@@ -2805,9 +3872,9 @@
                 <a:solidFill>
                   <a:srgbClr val="111111"/>
                 </a:solidFill>
-                <a:latin typeface="Noto Serif CJK JP" pitchFamily="34" charset="0"/>
-                <a:ea typeface="Noto Serif CJK JP" pitchFamily="34" charset="-122"/>
-                <a:cs typeface="Noto Serif CJK JP" pitchFamily="34" charset="-120"/>
+                <a:latin typeface="Shippori Mincho" pitchFamily="34" charset="0"/>
+                <a:ea typeface="Shippori Mincho" pitchFamily="34" charset="-122"/>
+                <a:cs typeface="Shippori Mincho" pitchFamily="34" charset="-120"/>
               </a:rPr>
               <a:t>街で拾った断片が、一冊になる</a:t>
             </a:r>
@@ -2867,9 +3934,9 @@
                 <a:solidFill>
                   <a:srgbClr val="665F58"/>
                 </a:solidFill>
-                <a:latin typeface="DejaVu Sans" pitchFamily="34" charset="0"/>
-                <a:ea typeface="DejaVu Sans" pitchFamily="34" charset="-122"/>
-                <a:cs typeface="DejaVu Sans" pitchFamily="34" charset="-120"/>
+                <a:latin typeface="Manrope" pitchFamily="34" charset="0"/>
+                <a:ea typeface="Manrope" pitchFamily="34" charset="-122"/>
+                <a:cs typeface="Manrope" pitchFamily="34" charset="-120"/>
               </a:rPr>
               <a:t>05 / 08</a:t>
             </a:r>
@@ -2908,28 +3975,11 @@
                 <a:solidFill>
                   <a:srgbClr val="111111"/>
                 </a:solidFill>
-                <a:latin typeface="Noto Sans CJK JP" pitchFamily="34" charset="0"/>
-                <a:ea typeface="Noto Sans CJK JP" pitchFamily="34" charset="-122"/>
-                <a:cs typeface="Noto Sans CJK JP" pitchFamily="34" charset="-120"/>
-              </a:rPr>
-              <a:t>写真と短い言葉を、</a:t>
-            </a:r>
-            <a:endParaRPr lang="en-US" sz="1800" dirty="0"/>
-          </a:p>
-          <a:p>
-            <a:pPr algn="l" indent="0" marL="0">
-              <a:buNone/>
-            </a:pPr>
-            <a:r>
-              <a:rPr lang="en-US" sz="1800" b="1" dirty="0">
-                <a:solidFill>
-                  <a:srgbClr val="111111"/>
-                </a:solidFill>
-                <a:latin typeface="Noto Sans CJK JP" pitchFamily="34" charset="0"/>
-                <a:ea typeface="Noto Sans CJK JP" pitchFamily="34" charset="-122"/>
-                <a:cs typeface="Noto Sans CJK JP" pitchFamily="34" charset="-120"/>
-              </a:rPr>
-              <a:t>一冊の素材に。</a:t>
+                <a:latin typeface="BIZ UDPGothic" pitchFamily="34" charset="0"/>
+                <a:ea typeface="BIZ UDPGothic" pitchFamily="34" charset="-122"/>
+                <a:cs typeface="BIZ UDPGothic" pitchFamily="34" charset="-120"/>
+              </a:rPr>
+              <a:t>写真と短文を、三つの手順で一頁へ</a:t>
             </a:r>
             <a:endParaRPr lang="en-US" sz="1800" dirty="0"/>
           </a:p>
@@ -2943,7 +3993,7 @@
         </p:nvSpPr>
         <p:spPr>
           <a:xfrm>
-            <a:off x="841248" y="2450592"/>
+            <a:off x="841248" y="2749296"/>
             <a:ext cx="347472" cy="347472"/>
           </a:xfrm>
           <a:prstGeom prst="ellipse">
@@ -2968,8 +4018,49 @@
         </p:nvSpPr>
         <p:spPr>
           <a:xfrm>
-            <a:off x="841248" y="2523744"/>
-            <a:ext cx="347472" cy="137160"/>
+            <a:off x="841248" y="2749296"/>
+            <a:ext cx="347472" cy="347472"/>
+          </a:xfrm>
+          <a:prstGeom prst="rect">
+            <a:avLst/>
+          </a:prstGeom>
+          <a:noFill/>
+          <a:ln/>
+        </p:spPr>
+        <p:txBody>
+          <a:bodyPr wrap="square" lIns="0" tIns="0" rIns="0" bIns="0" rtlCol="0" anchor="ctr">
+            <a:normAutofit/>
+          </a:bodyPr>
+          <a:lstStyle/>
+          <a:p>
+            <a:pPr algn="ctr" indent="0" marL="0">
+              <a:buNone/>
+            </a:pPr>
+            <a:r>
+              <a:rPr lang="en-US" sz="1000" b="1" dirty="0">
+                <a:solidFill>
+                  <a:srgbClr val="FFFFFF"/>
+                </a:solidFill>
+                <a:latin typeface="BIZ UDPGothic" pitchFamily="34" charset="0"/>
+                <a:ea typeface="BIZ UDPGothic" pitchFamily="34" charset="-122"/>
+                <a:cs typeface="BIZ UDPGothic" pitchFamily="34" charset="-120"/>
+              </a:rPr>
+              <a:t>1</a:t>
+            </a:r>
+            <a:endParaRPr lang="en-US" sz="1000" dirty="0"/>
+          </a:p>
+        </p:txBody>
+      </p:sp>
+      <p:sp>
+        <p:nvSpPr>
+          <p:cNvPr id="8" name="Text 6"/>
+          <p:cNvSpPr txBox="1"/>
+          <p:nvPr/>
+        </p:nvSpPr>
+        <p:spPr>
+          <a:xfrm>
+            <a:off x="1344168" y="2404872"/>
+            <a:ext cx="4206240" cy="1036320"/>
           </a:xfrm>
           <a:prstGeom prst="rect">
             <a:avLst/>
@@ -2983,47 +4074,6 @@
           </a:bodyPr>
           <a:lstStyle/>
           <a:p>
-            <a:pPr algn="ctr" indent="0" marL="0">
-              <a:buNone/>
-            </a:pPr>
-            <a:r>
-              <a:rPr lang="en-US" sz="900" b="1" dirty="0">
-                <a:solidFill>
-                  <a:srgbClr val="FFFFFF"/>
-                </a:solidFill>
-                <a:latin typeface="Noto Sans CJK JP" pitchFamily="34" charset="0"/>
-                <a:ea typeface="Noto Sans CJK JP" pitchFamily="34" charset="-122"/>
-                <a:cs typeface="Noto Sans CJK JP" pitchFamily="34" charset="-120"/>
-              </a:rPr>
-              <a:t>1</a:t>
-            </a:r>
-            <a:endParaRPr lang="en-US" sz="900" dirty="0"/>
-          </a:p>
-        </p:txBody>
-      </p:sp>
-      <p:sp>
-        <p:nvSpPr>
-          <p:cNvPr id="8" name="Text 6"/>
-          <p:cNvSpPr txBox="1"/>
-          <p:nvPr/>
-        </p:nvSpPr>
-        <p:spPr>
-          <a:xfrm>
-            <a:off x="1344168" y="2404872"/>
-            <a:ext cx="4206240" cy="853440"/>
-          </a:xfrm>
-          <a:prstGeom prst="rect">
-            <a:avLst/>
-          </a:prstGeom>
-          <a:noFill/>
-          <a:ln/>
-        </p:spPr>
-        <p:txBody>
-          <a:bodyPr wrap="square" lIns="254" tIns="254" rIns="254" bIns="254" rtlCol="0" anchor="ctr">
-            <a:normAutofit/>
-          </a:bodyPr>
-          <a:lstStyle/>
-          <a:p>
             <a:pPr algn="l" indent="0" marL="0">
               <a:buNone/>
             </a:pPr>
@@ -3032,9 +4082,9 @@
                 <a:solidFill>
                   <a:srgbClr val="111111"/>
                 </a:solidFill>
-                <a:latin typeface="Noto Sans CJK JP" pitchFamily="34" charset="0"/>
-                <a:ea typeface="Noto Sans CJK JP" pitchFamily="34" charset="-122"/>
-                <a:cs typeface="Noto Sans CJK JP" pitchFamily="34" charset="-120"/>
+                <a:latin typeface="BIZ UDPGothic" pitchFamily="34" charset="0"/>
+                <a:ea typeface="BIZ UDPGothic" pitchFamily="34" charset="-122"/>
+                <a:cs typeface="BIZ UDPGothic" pitchFamily="34" charset="-120"/>
               </a:rPr>
               <a:t>一冊を選ぶ｜心に残る言葉をひとつ</a:t>
             </a:r>
@@ -3050,7 +4100,7 @@
         </p:nvSpPr>
         <p:spPr>
           <a:xfrm>
-            <a:off x="841248" y="3486912"/>
+            <a:off x="841248" y="3968496"/>
             <a:ext cx="347472" cy="347472"/>
           </a:xfrm>
           <a:prstGeom prst="ellipse">
@@ -3075,8 +4125,49 @@
         </p:nvSpPr>
         <p:spPr>
           <a:xfrm>
-            <a:off x="841248" y="3560064"/>
-            <a:ext cx="347472" cy="137160"/>
+            <a:off x="841248" y="3968496"/>
+            <a:ext cx="347472" cy="347472"/>
+          </a:xfrm>
+          <a:prstGeom prst="rect">
+            <a:avLst/>
+          </a:prstGeom>
+          <a:noFill/>
+          <a:ln/>
+        </p:spPr>
+        <p:txBody>
+          <a:bodyPr wrap="square" lIns="0" tIns="0" rIns="0" bIns="0" rtlCol="0" anchor="ctr">
+            <a:normAutofit/>
+          </a:bodyPr>
+          <a:lstStyle/>
+          <a:p>
+            <a:pPr algn="ctr" indent="0" marL="0">
+              <a:buNone/>
+            </a:pPr>
+            <a:r>
+              <a:rPr lang="en-US" sz="1000" b="1" dirty="0">
+                <a:solidFill>
+                  <a:srgbClr val="C2410C"/>
+                </a:solidFill>
+                <a:latin typeface="BIZ UDPGothic" pitchFamily="34" charset="0"/>
+                <a:ea typeface="BIZ UDPGothic" pitchFamily="34" charset="-122"/>
+                <a:cs typeface="BIZ UDPGothic" pitchFamily="34" charset="-120"/>
+              </a:rPr>
+              <a:t>2</a:t>
+            </a:r>
+            <a:endParaRPr lang="en-US" sz="1000" dirty="0"/>
+          </a:p>
+        </p:txBody>
+      </p:sp>
+      <p:sp>
+        <p:nvSpPr>
+          <p:cNvPr id="11" name="Text 9"/>
+          <p:cNvSpPr txBox="1"/>
+          <p:nvPr/>
+        </p:nvSpPr>
+        <p:spPr>
+          <a:xfrm>
+            <a:off x="1344168" y="3624072"/>
+            <a:ext cx="4206240" cy="1036320"/>
           </a:xfrm>
           <a:prstGeom prst="rect">
             <a:avLst/>
@@ -3090,47 +4181,6 @@
           </a:bodyPr>
           <a:lstStyle/>
           <a:p>
-            <a:pPr algn="ctr" indent="0" marL="0">
-              <a:buNone/>
-            </a:pPr>
-            <a:r>
-              <a:rPr lang="en-US" sz="900" b="1" dirty="0">
-                <a:solidFill>
-                  <a:srgbClr val="C2410C"/>
-                </a:solidFill>
-                <a:latin typeface="Noto Sans CJK JP" pitchFamily="34" charset="0"/>
-                <a:ea typeface="Noto Sans CJK JP" pitchFamily="34" charset="-122"/>
-                <a:cs typeface="Noto Sans CJK JP" pitchFamily="34" charset="-120"/>
-              </a:rPr>
-              <a:t>2</a:t>
-            </a:r>
-            <a:endParaRPr lang="en-US" sz="900" dirty="0"/>
-          </a:p>
-        </p:txBody>
-      </p:sp>
-      <p:sp>
-        <p:nvSpPr>
-          <p:cNvPr id="11" name="Text 9"/>
-          <p:cNvSpPr txBox="1"/>
-          <p:nvPr/>
-        </p:nvSpPr>
-        <p:spPr>
-          <a:xfrm>
-            <a:off x="1344168" y="3441192"/>
-            <a:ext cx="4206240" cy="853440"/>
-          </a:xfrm>
-          <a:prstGeom prst="rect">
-            <a:avLst/>
-          </a:prstGeom>
-          <a:noFill/>
-          <a:ln/>
-        </p:spPr>
-        <p:txBody>
-          <a:bodyPr wrap="square" lIns="254" tIns="254" rIns="254" bIns="254" rtlCol="0" anchor="ctr">
-            <a:normAutofit/>
-          </a:bodyPr>
-          <a:lstStyle/>
-          <a:p>
             <a:pPr algn="l" indent="0" marL="0">
               <a:buNone/>
             </a:pPr>
@@ -3139,9 +4189,9 @@
                 <a:solidFill>
                   <a:srgbClr val="111111"/>
                 </a:solidFill>
-                <a:latin typeface="Noto Sans CJK JP" pitchFamily="34" charset="0"/>
-                <a:ea typeface="Noto Sans CJK JP" pitchFamily="34" charset="-122"/>
-                <a:cs typeface="Noto Sans CJK JP" pitchFamily="34" charset="-120"/>
+                <a:latin typeface="BIZ UDPGothic" pitchFamily="34" charset="0"/>
+                <a:ea typeface="BIZ UDPGothic" pitchFamily="34" charset="-122"/>
+                <a:cs typeface="BIZ UDPGothic" pitchFamily="34" charset="-120"/>
               </a:rPr>
               <a:t>街を歩く｜その言葉と出会う場所を探す</a:t>
             </a:r>
@@ -3157,7 +4207,7 @@
         </p:nvSpPr>
         <p:spPr>
           <a:xfrm>
-            <a:off x="841248" y="4523232"/>
+            <a:off x="841248" y="5187696"/>
             <a:ext cx="347472" cy="347472"/>
           </a:xfrm>
           <a:prstGeom prst="ellipse">
@@ -3182,8 +4232,49 @@
         </p:nvSpPr>
         <p:spPr>
           <a:xfrm>
-            <a:off x="841248" y="4596384"/>
-            <a:ext cx="347472" cy="137160"/>
+            <a:off x="841248" y="5187696"/>
+            <a:ext cx="347472" cy="347472"/>
+          </a:xfrm>
+          <a:prstGeom prst="rect">
+            <a:avLst/>
+          </a:prstGeom>
+          <a:noFill/>
+          <a:ln/>
+        </p:spPr>
+        <p:txBody>
+          <a:bodyPr wrap="square" lIns="0" tIns="0" rIns="0" bIns="0" rtlCol="0" anchor="ctr">
+            <a:normAutofit/>
+          </a:bodyPr>
+          <a:lstStyle/>
+          <a:p>
+            <a:pPr algn="ctr" indent="0" marL="0">
+              <a:buNone/>
+            </a:pPr>
+            <a:r>
+              <a:rPr lang="en-US" sz="1000" b="1" dirty="0">
+                <a:solidFill>
+                  <a:srgbClr val="C2410C"/>
+                </a:solidFill>
+                <a:latin typeface="BIZ UDPGothic" pitchFamily="34" charset="0"/>
+                <a:ea typeface="BIZ UDPGothic" pitchFamily="34" charset="-122"/>
+                <a:cs typeface="BIZ UDPGothic" pitchFamily="34" charset="-120"/>
+              </a:rPr>
+              <a:t>3</a:t>
+            </a:r>
+            <a:endParaRPr lang="en-US" sz="1000" dirty="0"/>
+          </a:p>
+        </p:txBody>
+      </p:sp>
+      <p:sp>
+        <p:nvSpPr>
+          <p:cNvPr id="14" name="Text 12"/>
+          <p:cNvSpPr txBox="1"/>
+          <p:nvPr/>
+        </p:nvSpPr>
+        <p:spPr>
+          <a:xfrm>
+            <a:off x="1344168" y="4843272"/>
+            <a:ext cx="4206240" cy="1036320"/>
           </a:xfrm>
           <a:prstGeom prst="rect">
             <a:avLst/>
@@ -3197,47 +4288,6 @@
           </a:bodyPr>
           <a:lstStyle/>
           <a:p>
-            <a:pPr algn="ctr" indent="0" marL="0">
-              <a:buNone/>
-            </a:pPr>
-            <a:r>
-              <a:rPr lang="en-US" sz="900" b="1" dirty="0">
-                <a:solidFill>
-                  <a:srgbClr val="C2410C"/>
-                </a:solidFill>
-                <a:latin typeface="Noto Sans CJK JP" pitchFamily="34" charset="0"/>
-                <a:ea typeface="Noto Sans CJK JP" pitchFamily="34" charset="-122"/>
-                <a:cs typeface="Noto Sans CJK JP" pitchFamily="34" charset="-120"/>
-              </a:rPr>
-              <a:t>3</a:t>
-            </a:r>
-            <a:endParaRPr lang="en-US" sz="900" dirty="0"/>
-          </a:p>
-        </p:txBody>
-      </p:sp>
-      <p:sp>
-        <p:nvSpPr>
-          <p:cNvPr id="14" name="Text 12"/>
-          <p:cNvSpPr txBox="1"/>
-          <p:nvPr/>
-        </p:nvSpPr>
-        <p:spPr>
-          <a:xfrm>
-            <a:off x="1344168" y="4477512"/>
-            <a:ext cx="4206240" cy="853440"/>
-          </a:xfrm>
-          <a:prstGeom prst="rect">
-            <a:avLst/>
-          </a:prstGeom>
-          <a:noFill/>
-          <a:ln/>
-        </p:spPr>
-        <p:txBody>
-          <a:bodyPr wrap="square" lIns="254" tIns="254" rIns="254" bIns="254" rtlCol="0" anchor="ctr">
-            <a:normAutofit/>
-          </a:bodyPr>
-          <a:lstStyle/>
-          <a:p>
             <a:pPr algn="l" indent="0" marL="0">
               <a:buNone/>
             </a:pPr>
@@ -3246,9 +4296,9 @@
                 <a:solidFill>
                   <a:srgbClr val="111111"/>
                 </a:solidFill>
-                <a:latin typeface="Noto Sans CJK JP" pitchFamily="34" charset="0"/>
-                <a:ea typeface="Noto Sans CJK JP" pitchFamily="34" charset="-122"/>
-                <a:cs typeface="Noto Sans CJK JP" pitchFamily="34" charset="-120"/>
+                <a:latin typeface="BIZ UDPGothic" pitchFamily="34" charset="0"/>
+                <a:ea typeface="BIZ UDPGothic" pitchFamily="34" charset="-122"/>
+                <a:cs typeface="BIZ UDPGothic" pitchFamily="34" charset="-120"/>
               </a:rPr>
               <a:t>一頁にする｜写真と短文を編集する</a:t>
             </a:r>
@@ -3265,11 +4315,11 @@
         <p:spPr>
           <a:xfrm>
             <a:off x="6172200" y="1389888"/>
-            <a:ext cx="5138928" cy="4407408"/>
+            <a:ext cx="5138928" cy="4773168"/>
           </a:xfrm>
           <a:prstGeom prst="rect">
             <a:avLst>
-              <a:gd name="adj" fmla="val 415"/>
+              <a:gd name="adj" fmla="val 383"/>
             </a:avLst>
           </a:prstGeom>
           <a:solidFill>
@@ -3314,9 +4364,9 @@
                 <a:solidFill>
                   <a:srgbClr val="C2410C"/>
                 </a:solidFill>
-                <a:latin typeface="Noto Sans CJK JP" pitchFamily="34" charset="0"/>
-                <a:ea typeface="Noto Sans CJK JP" pitchFamily="34" charset="-122"/>
-                <a:cs typeface="Noto Sans CJK JP" pitchFamily="34" charset="-120"/>
+                <a:latin typeface="BIZ UDPGothic" pitchFamily="34" charset="0"/>
+                <a:ea typeface="BIZ UDPGothic" pitchFamily="34" charset="-122"/>
+                <a:cs typeface="BIZ UDPGothic" pitchFamily="34" charset="-120"/>
               </a:rPr>
               <a:t>体験の断片</a:t>
             </a:r>
@@ -3355,9 +4405,9 @@
                 <a:solidFill>
                   <a:srgbClr val="111111"/>
                 </a:solidFill>
-                <a:latin typeface="Noto Sans CJK JP" pitchFamily="34" charset="0"/>
-                <a:ea typeface="Noto Sans CJK JP" pitchFamily="34" charset="-122"/>
-                <a:cs typeface="Noto Sans CJK JP" pitchFamily="34" charset="-120"/>
+                <a:latin typeface="BIZ UDPGothic" pitchFamily="34" charset="0"/>
+                <a:ea typeface="BIZ UDPGothic" pitchFamily="34" charset="-122"/>
+                <a:cs typeface="BIZ UDPGothic" pitchFamily="34" charset="-120"/>
               </a:rPr>
               <a:t>街を見る目の違いを楽しむ。</a:t>
             </a:r>
@@ -3373,7 +4423,7 @@
         </p:nvSpPr>
         <p:spPr>
           <a:xfrm>
-            <a:off x="6483096" y="3063240"/>
+            <a:off x="6483096" y="3364992"/>
             <a:ext cx="310896" cy="310896"/>
           </a:xfrm>
           <a:prstGeom prst="ellipse">
@@ -3398,8 +4448,8 @@
         </p:nvSpPr>
         <p:spPr>
           <a:xfrm>
-            <a:off x="6483096" y="3136392"/>
-            <a:ext cx="310896" cy="118872"/>
+            <a:off x="6483096" y="3364992"/>
+            <a:ext cx="310896" cy="310896"/>
           </a:xfrm>
           <a:prstGeom prst="rect">
             <a:avLst/>
@@ -3417,17 +4467,17 @@
               <a:buNone/>
             </a:pPr>
             <a:r>
-              <a:rPr lang="en-US" sz="850" b="1" dirty="0">
+              <a:rPr lang="en-US" sz="1000" b="1" dirty="0">
                 <a:solidFill>
                   <a:srgbClr val="FFFFFF"/>
                 </a:solidFill>
-                <a:latin typeface="Noto Sans CJK JP" pitchFamily="34" charset="0"/>
-                <a:ea typeface="Noto Sans CJK JP" pitchFamily="34" charset="-122"/>
-                <a:cs typeface="Noto Sans CJK JP" pitchFamily="34" charset="-120"/>
+                <a:latin typeface="BIZ UDPGothic" pitchFamily="34" charset="0"/>
+                <a:ea typeface="BIZ UDPGothic" pitchFamily="34" charset="-122"/>
+                <a:cs typeface="BIZ UDPGothic" pitchFamily="34" charset="-120"/>
               </a:rPr>
               <a:t>1</a:t>
             </a:r>
-            <a:endParaRPr lang="en-US" sz="850" dirty="0"/>
+            <a:endParaRPr lang="en-US" sz="1000" dirty="0"/>
           </a:p>
         </p:txBody>
       </p:sp>
@@ -3439,8 +4489,8 @@
         </p:nvSpPr>
         <p:spPr>
           <a:xfrm>
-            <a:off x="6958584" y="3017520"/>
-            <a:ext cx="4059936" cy="420624"/>
+            <a:off x="6958584" y="3236976"/>
+            <a:ext cx="4059936" cy="566928"/>
           </a:xfrm>
           <a:prstGeom prst="rect">
             <a:avLst/>
@@ -3458,17 +4508,17 @@
               <a:buNone/>
             </a:pPr>
             <a:r>
-              <a:rPr lang="en-US" sz="1280" dirty="0">
-                <a:solidFill>
-                  <a:srgbClr val="665F58"/>
-                </a:solidFill>
-                <a:latin typeface="Noto Sans CJK JP" pitchFamily="34" charset="0"/>
-                <a:ea typeface="Noto Sans CJK JP" pitchFamily="34" charset="-122"/>
-                <a:cs typeface="Noto Sans CJK JP" pitchFamily="34" charset="-120"/>
+              <a:rPr lang="en-US" sz="1600" dirty="0">
+                <a:solidFill>
+                  <a:srgbClr val="111111"/>
+                </a:solidFill>
+                <a:latin typeface="BIZ UDPGothic" pitchFamily="34" charset="0"/>
+                <a:ea typeface="BIZ UDPGothic" pitchFamily="34" charset="-122"/>
+                <a:cs typeface="BIZ UDPGothic" pitchFamily="34" charset="-120"/>
               </a:rPr>
               <a:t>本の一節をメモした紙片</a:t>
             </a:r>
-            <a:endParaRPr lang="en-US" sz="1280" dirty="0"/>
+            <a:endParaRPr lang="en-US" sz="1600" dirty="0"/>
           </a:p>
         </p:txBody>
       </p:sp>
@@ -3480,7 +4530,7 @@
         </p:nvSpPr>
         <p:spPr>
           <a:xfrm>
-            <a:off x="6483096" y="3813048"/>
+            <a:off x="6483096" y="4242816"/>
             <a:ext cx="310896" cy="310896"/>
           </a:xfrm>
           <a:prstGeom prst="ellipse">
@@ -3505,8 +4555,8 @@
         </p:nvSpPr>
         <p:spPr>
           <a:xfrm>
-            <a:off x="6483096" y="3886200"/>
-            <a:ext cx="310896" cy="118872"/>
+            <a:off x="6483096" y="4242816"/>
+            <a:ext cx="310896" cy="310896"/>
           </a:xfrm>
           <a:prstGeom prst="rect">
             <a:avLst/>
@@ -3524,17 +4574,17 @@
               <a:buNone/>
             </a:pPr>
             <a:r>
-              <a:rPr lang="en-US" sz="850" b="1" dirty="0">
+              <a:rPr lang="en-US" sz="1000" b="1" dirty="0">
                 <a:solidFill>
                   <a:srgbClr val="C2410C"/>
                 </a:solidFill>
-                <a:latin typeface="Noto Sans CJK JP" pitchFamily="34" charset="0"/>
-                <a:ea typeface="Noto Sans CJK JP" pitchFamily="34" charset="-122"/>
-                <a:cs typeface="Noto Sans CJK JP" pitchFamily="34" charset="-120"/>
+                <a:latin typeface="BIZ UDPGothic" pitchFamily="34" charset="0"/>
+                <a:ea typeface="BIZ UDPGothic" pitchFamily="34" charset="-122"/>
+                <a:cs typeface="BIZ UDPGothic" pitchFamily="34" charset="-120"/>
               </a:rPr>
               <a:t>2</a:t>
             </a:r>
-            <a:endParaRPr lang="en-US" sz="850" dirty="0"/>
+            <a:endParaRPr lang="en-US" sz="1000" dirty="0"/>
           </a:p>
         </p:txBody>
       </p:sp>
@@ -3546,8 +4596,8 @@
         </p:nvSpPr>
         <p:spPr>
           <a:xfrm>
-            <a:off x="6958584" y="3767328"/>
-            <a:ext cx="4059936" cy="420624"/>
+            <a:off x="6958584" y="4114800"/>
+            <a:ext cx="4059936" cy="566928"/>
           </a:xfrm>
           <a:prstGeom prst="rect">
             <a:avLst/>
@@ -3565,17 +4615,17 @@
               <a:buNone/>
             </a:pPr>
             <a:r>
-              <a:rPr lang="en-US" sz="1280" dirty="0">
-                <a:solidFill>
-                  <a:srgbClr val="665F58"/>
-                </a:solidFill>
-                <a:latin typeface="Noto Sans CJK JP" pitchFamily="34" charset="0"/>
-                <a:ea typeface="Noto Sans CJK JP" pitchFamily="34" charset="-122"/>
-                <a:cs typeface="Noto Sans CJK JP" pitchFamily="34" charset="-120"/>
+              <a:rPr lang="en-US" sz="1600" dirty="0">
+                <a:solidFill>
+                  <a:srgbClr val="111111"/>
+                </a:solidFill>
+                <a:latin typeface="BIZ UDPGothic" pitchFamily="34" charset="0"/>
+                <a:ea typeface="BIZ UDPGothic" pitchFamily="34" charset="-122"/>
+                <a:cs typeface="BIZ UDPGothic" pitchFamily="34" charset="-120"/>
               </a:rPr>
               <a:t>路地で見つけた光の写真</a:t>
             </a:r>
-            <a:endParaRPr lang="en-US" sz="1280" dirty="0"/>
+            <a:endParaRPr lang="en-US" sz="1600" dirty="0"/>
           </a:p>
         </p:txBody>
       </p:sp>
@@ -3587,7 +4637,7 @@
         </p:nvSpPr>
         <p:spPr>
           <a:xfrm>
-            <a:off x="6483096" y="4562856"/>
+            <a:off x="6483096" y="5120640"/>
             <a:ext cx="310896" cy="310896"/>
           </a:xfrm>
           <a:prstGeom prst="ellipse">
@@ -3612,8 +4662,8 @@
         </p:nvSpPr>
         <p:spPr>
           <a:xfrm>
-            <a:off x="6483096" y="4636008"/>
-            <a:ext cx="310896" cy="118872"/>
+            <a:off x="6483096" y="5120640"/>
+            <a:ext cx="310896" cy="310896"/>
           </a:xfrm>
           <a:prstGeom prst="rect">
             <a:avLst/>
@@ -3631,17 +4681,17 @@
               <a:buNone/>
             </a:pPr>
             <a:r>
-              <a:rPr lang="en-US" sz="850" b="1" dirty="0">
+              <a:rPr lang="en-US" sz="1000" b="1" dirty="0">
                 <a:solidFill>
                   <a:srgbClr val="C2410C"/>
                 </a:solidFill>
-                <a:latin typeface="Noto Sans CJK JP" pitchFamily="34" charset="0"/>
-                <a:ea typeface="Noto Sans CJK JP" pitchFamily="34" charset="-122"/>
-                <a:cs typeface="Noto Sans CJK JP" pitchFamily="34" charset="-120"/>
+                <a:latin typeface="BIZ UDPGothic" pitchFamily="34" charset="0"/>
+                <a:ea typeface="BIZ UDPGothic" pitchFamily="34" charset="-122"/>
+                <a:cs typeface="BIZ UDPGothic" pitchFamily="34" charset="-120"/>
               </a:rPr>
               <a:t>3</a:t>
             </a:r>
-            <a:endParaRPr lang="en-US" sz="850" dirty="0"/>
+            <a:endParaRPr lang="en-US" sz="1000" dirty="0"/>
           </a:p>
         </p:txBody>
       </p:sp>
@@ -3653,8 +4703,8 @@
         </p:nvSpPr>
         <p:spPr>
           <a:xfrm>
-            <a:off x="6958584" y="4517136"/>
-            <a:ext cx="4059936" cy="420624"/>
+            <a:off x="6958584" y="4992624"/>
+            <a:ext cx="4059936" cy="566928"/>
           </a:xfrm>
           <a:prstGeom prst="rect">
             <a:avLst/>
@@ -3672,17 +4722,17 @@
               <a:buNone/>
             </a:pPr>
             <a:r>
-              <a:rPr lang="en-US" sz="1280" dirty="0">
-                <a:solidFill>
-                  <a:srgbClr val="665F58"/>
-                </a:solidFill>
-                <a:latin typeface="Noto Sans CJK JP" pitchFamily="34" charset="0"/>
-                <a:ea typeface="Noto Sans CJK JP" pitchFamily="34" charset="-122"/>
-                <a:cs typeface="Noto Sans CJK JP" pitchFamily="34" charset="-120"/>
+              <a:rPr lang="en-US" sz="1600" dirty="0">
+                <a:solidFill>
+                  <a:srgbClr val="111111"/>
+                </a:solidFill>
+                <a:latin typeface="BIZ UDPGothic" pitchFamily="34" charset="0"/>
+                <a:ea typeface="BIZ UDPGothic" pitchFamily="34" charset="-122"/>
+                <a:cs typeface="BIZ UDPGothic" pitchFamily="34" charset="-120"/>
               </a:rPr>
               <a:t>店先の会話から生まれた短文</a:t>
             </a:r>
-            <a:endParaRPr lang="en-US" sz="1280" dirty="0"/>
+            <a:endParaRPr lang="en-US" sz="1600" dirty="0"/>
           </a:p>
         </p:txBody>
       </p:sp>
@@ -3774,9 +4824,9 @@
                 <a:solidFill>
                   <a:srgbClr val="111111"/>
                 </a:solidFill>
-                <a:latin typeface="Noto Serif CJK JP" pitchFamily="34" charset="0"/>
-                <a:ea typeface="Noto Serif CJK JP" pitchFamily="34" charset="-122"/>
-                <a:cs typeface="Noto Serif CJK JP" pitchFamily="34" charset="-120"/>
+                <a:latin typeface="Shippori Mincho" pitchFamily="34" charset="0"/>
+                <a:ea typeface="Shippori Mincho" pitchFamily="34" charset="-122"/>
+                <a:cs typeface="Shippori Mincho" pitchFamily="34" charset="-120"/>
               </a:rPr>
               <a:t>週末編集室の体験</a:t>
             </a:r>
@@ -3836,9 +4886,9 @@
                 <a:solidFill>
                   <a:srgbClr val="665F58"/>
                 </a:solidFill>
-                <a:latin typeface="DejaVu Sans" pitchFamily="34" charset="0"/>
-                <a:ea typeface="DejaVu Sans" pitchFamily="34" charset="-122"/>
-                <a:cs typeface="DejaVu Sans" pitchFamily="34" charset="-120"/>
+                <a:latin typeface="Manrope" pitchFamily="34" charset="0"/>
+                <a:ea typeface="Manrope" pitchFamily="34" charset="-122"/>
+                <a:cs typeface="Manrope" pitchFamily="34" charset="-120"/>
               </a:rPr>
               <a:t>06 / 08</a:t>
             </a:r>
@@ -3854,7 +4904,7 @@
         </p:nvSpPr>
         <p:spPr>
           <a:xfrm>
-            <a:off x="914400" y="2212848"/>
+            <a:off x="914400" y="2029968"/>
             <a:ext cx="2400300" cy="256032"/>
           </a:xfrm>
           <a:prstGeom prst="rect">
@@ -3879,7 +4929,7 @@
         </p:nvSpPr>
         <p:spPr>
           <a:xfrm>
-            <a:off x="914400" y="1828800"/>
+            <a:off x="914400" y="1645920"/>
             <a:ext cx="2400300" cy="219456"/>
           </a:xfrm>
           <a:prstGeom prst="rect">
@@ -3902,9 +4952,9 @@
                 <a:solidFill>
                   <a:srgbClr val="665F58"/>
                 </a:solidFill>
-                <a:latin typeface="Noto Sans CJK JP" pitchFamily="34" charset="0"/>
-                <a:ea typeface="Noto Sans CJK JP" pitchFamily="34" charset="-122"/>
-                <a:cs typeface="Noto Sans CJK JP" pitchFamily="34" charset="-120"/>
+                <a:latin typeface="BIZ UDPGothic" pitchFamily="34" charset="0"/>
+                <a:ea typeface="BIZ UDPGothic" pitchFamily="34" charset="-122"/>
+                <a:cs typeface="BIZ UDPGothic" pitchFamily="34" charset="-120"/>
               </a:rPr>
               <a:t>選書</a:t>
             </a:r>
@@ -3920,7 +4970,7 @@
         </p:nvSpPr>
         <p:spPr>
           <a:xfrm>
-            <a:off x="3406140" y="2212848"/>
+            <a:off x="3406140" y="2029968"/>
             <a:ext cx="2400300" cy="256032"/>
           </a:xfrm>
           <a:prstGeom prst="rect">
@@ -3945,7 +4995,7 @@
         </p:nvSpPr>
         <p:spPr>
           <a:xfrm>
-            <a:off x="3406140" y="1828800"/>
+            <a:off x="3406140" y="1645920"/>
             <a:ext cx="2400300" cy="219456"/>
           </a:xfrm>
           <a:prstGeom prst="rect">
@@ -3968,9 +5018,9 @@
                 <a:solidFill>
                   <a:srgbClr val="665F58"/>
                 </a:solidFill>
-                <a:latin typeface="Noto Sans CJK JP" pitchFamily="34" charset="0"/>
-                <a:ea typeface="Noto Sans CJK JP" pitchFamily="34" charset="-122"/>
-                <a:cs typeface="Noto Sans CJK JP" pitchFamily="34" charset="-120"/>
+                <a:latin typeface="BIZ UDPGothic" pitchFamily="34" charset="0"/>
+                <a:ea typeface="BIZ UDPGothic" pitchFamily="34" charset="-122"/>
+                <a:cs typeface="BIZ UDPGothic" pitchFamily="34" charset="-120"/>
               </a:rPr>
               <a:t>街歩き</a:t>
             </a:r>
@@ -3986,7 +5036,7 @@
         </p:nvSpPr>
         <p:spPr>
           <a:xfrm>
-            <a:off x="5897880" y="2212848"/>
+            <a:off x="5897880" y="2029968"/>
             <a:ext cx="2400300" cy="256032"/>
           </a:xfrm>
           <a:prstGeom prst="rect">
@@ -4011,7 +5061,7 @@
         </p:nvSpPr>
         <p:spPr>
           <a:xfrm>
-            <a:off x="5897880" y="1828800"/>
+            <a:off x="5897880" y="1645920"/>
             <a:ext cx="2400300" cy="219456"/>
           </a:xfrm>
           <a:prstGeom prst="rect">
@@ -4034,9 +5084,9 @@
                 <a:solidFill>
                   <a:srgbClr val="665F58"/>
                 </a:solidFill>
-                <a:latin typeface="Noto Sans CJK JP" pitchFamily="34" charset="0"/>
-                <a:ea typeface="Noto Sans CJK JP" pitchFamily="34" charset="-122"/>
-                <a:cs typeface="Noto Sans CJK JP" pitchFamily="34" charset="-120"/>
+                <a:latin typeface="BIZ UDPGothic" pitchFamily="34" charset="0"/>
+                <a:ea typeface="BIZ UDPGothic" pitchFamily="34" charset="-122"/>
+                <a:cs typeface="BIZ UDPGothic" pitchFamily="34" charset="-120"/>
               </a:rPr>
               <a:t>編集</a:t>
             </a:r>
@@ -4052,7 +5102,7 @@
         </p:nvSpPr>
         <p:spPr>
           <a:xfrm>
-            <a:off x="8389620" y="2212848"/>
+            <a:off x="8389620" y="2029968"/>
             <a:ext cx="2400300" cy="256032"/>
           </a:xfrm>
           <a:prstGeom prst="rect">
@@ -4077,7 +5127,7 @@
         </p:nvSpPr>
         <p:spPr>
           <a:xfrm>
-            <a:off x="8389620" y="1828800"/>
+            <a:off x="8389620" y="1645920"/>
             <a:ext cx="2400300" cy="219456"/>
           </a:xfrm>
           <a:prstGeom prst="rect">
@@ -4100,9 +5150,9 @@
                 <a:solidFill>
                   <a:srgbClr val="C2410C"/>
                 </a:solidFill>
-                <a:latin typeface="Noto Sans CJK JP" pitchFamily="34" charset="0"/>
-                <a:ea typeface="Noto Sans CJK JP" pitchFamily="34" charset="-122"/>
-                <a:cs typeface="Noto Sans CJK JP" pitchFamily="34" charset="-120"/>
+                <a:latin typeface="BIZ UDPGothic" pitchFamily="34" charset="0"/>
+                <a:ea typeface="BIZ UDPGothic" pitchFamily="34" charset="-122"/>
+                <a:cs typeface="BIZ UDPGothic" pitchFamily="34" charset="-120"/>
               </a:rPr>
               <a:t>共有</a:t>
             </a:r>
@@ -4118,7 +5168,379 @@
         </p:nvSpPr>
         <p:spPr>
           <a:xfrm>
-            <a:off x="960120" y="3172968"/>
+            <a:off x="914400" y="3872484"/>
+            <a:ext cx="347472" cy="347472"/>
+          </a:xfrm>
+          <a:prstGeom prst="ellipse">
+            <a:avLst/>
+          </a:prstGeom>
+          <a:solidFill>
+            <a:srgbClr val="E9E0D1"/>
+          </a:solidFill>
+          <a:ln w="8890">
+            <a:solidFill>
+              <a:srgbClr val="D7CCB9"/>
+            </a:solidFill>
+            <a:prstDash val="solid"/>
+          </a:ln>
+        </p:spPr>
+      </p:sp>
+      <p:sp>
+        <p:nvSpPr>
+          <p:cNvPr id="15" name="Text 13"/>
+          <p:cNvSpPr txBox="1"/>
+          <p:nvPr/>
+        </p:nvSpPr>
+        <p:spPr>
+          <a:xfrm>
+            <a:off x="914400" y="3872484"/>
+            <a:ext cx="347472" cy="347472"/>
+          </a:xfrm>
+          <a:prstGeom prst="rect">
+            <a:avLst/>
+          </a:prstGeom>
+          <a:noFill/>
+          <a:ln/>
+        </p:spPr>
+        <p:txBody>
+          <a:bodyPr wrap="square" lIns="0" tIns="0" rIns="0" bIns="0" rtlCol="0" anchor="ctr">
+            <a:normAutofit/>
+          </a:bodyPr>
+          <a:lstStyle/>
+          <a:p>
+            <a:pPr algn="ctr" indent="0" marL="0">
+              <a:buNone/>
+            </a:pPr>
+            <a:r>
+              <a:rPr lang="en-US" sz="1000" b="1" dirty="0">
+                <a:solidFill>
+                  <a:srgbClr val="C2410C"/>
+                </a:solidFill>
+                <a:latin typeface="BIZ UDPGothic" pitchFamily="34" charset="0"/>
+                <a:ea typeface="BIZ UDPGothic" pitchFamily="34" charset="-122"/>
+                <a:cs typeface="BIZ UDPGothic" pitchFamily="34" charset="-120"/>
+              </a:rPr>
+              <a:t>1</a:t>
+            </a:r>
+            <a:endParaRPr lang="en-US" sz="1000" dirty="0"/>
+          </a:p>
+        </p:txBody>
+      </p:sp>
+      <p:sp>
+        <p:nvSpPr>
+          <p:cNvPr id="16" name="Text 14"/>
+          <p:cNvSpPr txBox="1"/>
+          <p:nvPr/>
+        </p:nvSpPr>
+        <p:spPr>
+          <a:xfrm>
+            <a:off x="1417320" y="2834640"/>
+            <a:ext cx="1783080" cy="2423160"/>
+          </a:xfrm>
+          <a:prstGeom prst="rect">
+            <a:avLst/>
+          </a:prstGeom>
+          <a:noFill/>
+          <a:ln/>
+        </p:spPr>
+        <p:txBody>
+          <a:bodyPr wrap="square" lIns="254" tIns="254" rIns="254" bIns="254" rtlCol="0" anchor="ctr">
+            <a:normAutofit/>
+          </a:bodyPr>
+          <a:lstStyle/>
+          <a:p>
+            <a:pPr algn="l" indent="0" marL="0">
+              <a:buNone/>
+            </a:pPr>
+            <a:r>
+              <a:rPr lang="en-US" sz="1800" dirty="0">
+                <a:solidFill>
+                  <a:srgbClr val="111111"/>
+                </a:solidFill>
+                <a:latin typeface="BIZ UDPGothic" pitchFamily="34" charset="0"/>
+                <a:ea typeface="BIZ UDPGothic" pitchFamily="34" charset="-122"/>
+                <a:cs typeface="BIZ UDPGothic" pitchFamily="34" charset="-120"/>
+              </a:rPr>
+              <a:t>気になる一冊と</a:t>
+            </a:r>
+            <a:endParaRPr lang="en-US" sz="1800" dirty="0"/>
+          </a:p>
+          <a:p>
+            <a:pPr algn="l" indent="0" marL="0">
+              <a:buNone/>
+            </a:pPr>
+            <a:r>
+              <a:rPr lang="en-US" sz="1800" dirty="0">
+                <a:solidFill>
+                  <a:srgbClr val="111111"/>
+                </a:solidFill>
+                <a:latin typeface="BIZ UDPGothic" pitchFamily="34" charset="0"/>
+                <a:ea typeface="BIZ UDPGothic" pitchFamily="34" charset="-122"/>
+                <a:cs typeface="BIZ UDPGothic" pitchFamily="34" charset="-120"/>
+              </a:rPr>
+              <a:t>言葉を選ぶ</a:t>
+            </a:r>
+            <a:endParaRPr lang="en-US" sz="1800" dirty="0"/>
+          </a:p>
+        </p:txBody>
+      </p:sp>
+      <p:sp>
+        <p:nvSpPr>
+          <p:cNvPr id="17" name="Shape 15"/>
+          <p:cNvSpPr/>
+          <p:nvPr/>
+        </p:nvSpPr>
+        <p:spPr>
+          <a:xfrm>
+            <a:off x="3406140" y="3872484"/>
+            <a:ext cx="347472" cy="347472"/>
+          </a:xfrm>
+          <a:prstGeom prst="ellipse">
+            <a:avLst/>
+          </a:prstGeom>
+          <a:solidFill>
+            <a:srgbClr val="E9E0D1"/>
+          </a:solidFill>
+          <a:ln w="8890">
+            <a:solidFill>
+              <a:srgbClr val="D7CCB9"/>
+            </a:solidFill>
+            <a:prstDash val="solid"/>
+          </a:ln>
+        </p:spPr>
+      </p:sp>
+      <p:sp>
+        <p:nvSpPr>
+          <p:cNvPr id="18" name="Text 16"/>
+          <p:cNvSpPr txBox="1"/>
+          <p:nvPr/>
+        </p:nvSpPr>
+        <p:spPr>
+          <a:xfrm>
+            <a:off x="3406140" y="3872484"/>
+            <a:ext cx="347472" cy="347472"/>
+          </a:xfrm>
+          <a:prstGeom prst="rect">
+            <a:avLst/>
+          </a:prstGeom>
+          <a:noFill/>
+          <a:ln/>
+        </p:spPr>
+        <p:txBody>
+          <a:bodyPr wrap="square" lIns="0" tIns="0" rIns="0" bIns="0" rtlCol="0" anchor="ctr">
+            <a:normAutofit/>
+          </a:bodyPr>
+          <a:lstStyle/>
+          <a:p>
+            <a:pPr algn="ctr" indent="0" marL="0">
+              <a:buNone/>
+            </a:pPr>
+            <a:r>
+              <a:rPr lang="en-US" sz="1000" b="1" dirty="0">
+                <a:solidFill>
+                  <a:srgbClr val="C2410C"/>
+                </a:solidFill>
+                <a:latin typeface="BIZ UDPGothic" pitchFamily="34" charset="0"/>
+                <a:ea typeface="BIZ UDPGothic" pitchFamily="34" charset="-122"/>
+                <a:cs typeface="BIZ UDPGothic" pitchFamily="34" charset="-120"/>
+              </a:rPr>
+              <a:t>2</a:t>
+            </a:r>
+            <a:endParaRPr lang="en-US" sz="1000" dirty="0"/>
+          </a:p>
+        </p:txBody>
+      </p:sp>
+      <p:sp>
+        <p:nvSpPr>
+          <p:cNvPr id="19" name="Text 17"/>
+          <p:cNvSpPr txBox="1"/>
+          <p:nvPr/>
+        </p:nvSpPr>
+        <p:spPr>
+          <a:xfrm>
+            <a:off x="3909060" y="2834640"/>
+            <a:ext cx="1783080" cy="2423160"/>
+          </a:xfrm>
+          <a:prstGeom prst="rect">
+            <a:avLst/>
+          </a:prstGeom>
+          <a:noFill/>
+          <a:ln/>
+        </p:spPr>
+        <p:txBody>
+          <a:bodyPr wrap="square" lIns="254" tIns="254" rIns="254" bIns="254" rtlCol="0" anchor="ctr">
+            <a:normAutofit/>
+          </a:bodyPr>
+          <a:lstStyle/>
+          <a:p>
+            <a:pPr algn="l" indent="0" marL="0">
+              <a:buNone/>
+            </a:pPr>
+            <a:r>
+              <a:rPr lang="en-US" sz="1800" dirty="0">
+                <a:solidFill>
+                  <a:srgbClr val="111111"/>
+                </a:solidFill>
+                <a:latin typeface="BIZ UDPGothic" pitchFamily="34" charset="0"/>
+                <a:ea typeface="BIZ UDPGothic" pitchFamily="34" charset="-122"/>
+                <a:cs typeface="BIZ UDPGothic" pitchFamily="34" charset="-120"/>
+              </a:rPr>
+              <a:t>言葉に合う</a:t>
+            </a:r>
+            <a:endParaRPr lang="en-US" sz="1800" dirty="0"/>
+          </a:p>
+          <a:p>
+            <a:pPr algn="l" indent="0" marL="0">
+              <a:buNone/>
+            </a:pPr>
+            <a:r>
+              <a:rPr lang="en-US" sz="1800" dirty="0">
+                <a:solidFill>
+                  <a:srgbClr val="111111"/>
+                </a:solidFill>
+                <a:latin typeface="BIZ UDPGothic" pitchFamily="34" charset="0"/>
+                <a:ea typeface="BIZ UDPGothic" pitchFamily="34" charset="-122"/>
+                <a:cs typeface="BIZ UDPGothic" pitchFamily="34" charset="-120"/>
+              </a:rPr>
+              <a:t>写真を撮る</a:t>
+            </a:r>
+            <a:endParaRPr lang="en-US" sz="1800" dirty="0"/>
+          </a:p>
+        </p:txBody>
+      </p:sp>
+      <p:sp>
+        <p:nvSpPr>
+          <p:cNvPr id="20" name="Shape 18"/>
+          <p:cNvSpPr/>
+          <p:nvPr/>
+        </p:nvSpPr>
+        <p:spPr>
+          <a:xfrm>
+            <a:off x="5897880" y="3872484"/>
+            <a:ext cx="347472" cy="347472"/>
+          </a:xfrm>
+          <a:prstGeom prst="ellipse">
+            <a:avLst/>
+          </a:prstGeom>
+          <a:solidFill>
+            <a:srgbClr val="E9E0D1"/>
+          </a:solidFill>
+          <a:ln w="8890">
+            <a:solidFill>
+              <a:srgbClr val="D7CCB9"/>
+            </a:solidFill>
+            <a:prstDash val="solid"/>
+          </a:ln>
+        </p:spPr>
+      </p:sp>
+      <p:sp>
+        <p:nvSpPr>
+          <p:cNvPr id="21" name="Text 19"/>
+          <p:cNvSpPr txBox="1"/>
+          <p:nvPr/>
+        </p:nvSpPr>
+        <p:spPr>
+          <a:xfrm>
+            <a:off x="5897880" y="3872484"/>
+            <a:ext cx="347472" cy="347472"/>
+          </a:xfrm>
+          <a:prstGeom prst="rect">
+            <a:avLst/>
+          </a:prstGeom>
+          <a:noFill/>
+          <a:ln/>
+        </p:spPr>
+        <p:txBody>
+          <a:bodyPr wrap="square" lIns="0" tIns="0" rIns="0" bIns="0" rtlCol="0" anchor="ctr">
+            <a:normAutofit/>
+          </a:bodyPr>
+          <a:lstStyle/>
+          <a:p>
+            <a:pPr algn="ctr" indent="0" marL="0">
+              <a:buNone/>
+            </a:pPr>
+            <a:r>
+              <a:rPr lang="en-US" sz="1000" b="1" dirty="0">
+                <a:solidFill>
+                  <a:srgbClr val="C2410C"/>
+                </a:solidFill>
+                <a:latin typeface="BIZ UDPGothic" pitchFamily="34" charset="0"/>
+                <a:ea typeface="BIZ UDPGothic" pitchFamily="34" charset="-122"/>
+                <a:cs typeface="BIZ UDPGothic" pitchFamily="34" charset="-120"/>
+              </a:rPr>
+              <a:t>3</a:t>
+            </a:r>
+            <a:endParaRPr lang="en-US" sz="1000" dirty="0"/>
+          </a:p>
+        </p:txBody>
+      </p:sp>
+      <p:sp>
+        <p:nvSpPr>
+          <p:cNvPr id="22" name="Text 20"/>
+          <p:cNvSpPr txBox="1"/>
+          <p:nvPr/>
+        </p:nvSpPr>
+        <p:spPr>
+          <a:xfrm>
+            <a:off x="6400800" y="2834640"/>
+            <a:ext cx="1783080" cy="2423160"/>
+          </a:xfrm>
+          <a:prstGeom prst="rect">
+            <a:avLst/>
+          </a:prstGeom>
+          <a:noFill/>
+          <a:ln/>
+        </p:spPr>
+        <p:txBody>
+          <a:bodyPr wrap="square" lIns="254" tIns="254" rIns="254" bIns="254" rtlCol="0" anchor="ctr">
+            <a:normAutofit/>
+          </a:bodyPr>
+          <a:lstStyle/>
+          <a:p>
+            <a:pPr algn="l" indent="0" marL="0">
+              <a:buNone/>
+            </a:pPr>
+            <a:r>
+              <a:rPr lang="en-US" sz="1800" dirty="0">
+                <a:solidFill>
+                  <a:srgbClr val="111111"/>
+                </a:solidFill>
+                <a:latin typeface="BIZ UDPGothic" pitchFamily="34" charset="0"/>
+                <a:ea typeface="BIZ UDPGothic" pitchFamily="34" charset="-122"/>
+                <a:cs typeface="BIZ UDPGothic" pitchFamily="34" charset="-120"/>
+              </a:rPr>
+              <a:t>写真と短文を</a:t>
+            </a:r>
+            <a:endParaRPr lang="en-US" sz="1800" dirty="0"/>
+          </a:p>
+          <a:p>
+            <a:pPr algn="l" indent="0" marL="0">
+              <a:buNone/>
+            </a:pPr>
+            <a:r>
+              <a:rPr lang="en-US" sz="1800" dirty="0">
+                <a:solidFill>
+                  <a:srgbClr val="111111"/>
+                </a:solidFill>
+                <a:latin typeface="BIZ UDPGothic" pitchFamily="34" charset="0"/>
+                <a:ea typeface="BIZ UDPGothic" pitchFamily="34" charset="-122"/>
+                <a:cs typeface="BIZ UDPGothic" pitchFamily="34" charset="-120"/>
+              </a:rPr>
+              <a:t>一頁にする</a:t>
+            </a:r>
+            <a:endParaRPr lang="en-US" sz="1800" dirty="0"/>
+          </a:p>
+        </p:txBody>
+      </p:sp>
+      <p:sp>
+        <p:nvSpPr>
+          <p:cNvPr id="23" name="Shape 21"/>
+          <p:cNvSpPr/>
+          <p:nvPr/>
+        </p:nvSpPr>
+        <p:spPr>
+          <a:xfrm>
+            <a:off x="8389620" y="3872484"/>
             <a:ext cx="347472" cy="347472"/>
           </a:xfrm>
           <a:prstGeom prst="ellipse">
@@ -4137,14 +5559,55 @@
       </p:sp>
       <p:sp>
         <p:nvSpPr>
-          <p:cNvPr id="15" name="Text 13"/>
-          <p:cNvSpPr txBox="1"/>
-          <p:nvPr/>
-        </p:nvSpPr>
-        <p:spPr>
-          <a:xfrm>
-            <a:off x="960120" y="3246120"/>
-            <a:ext cx="347472" cy="137160"/>
+          <p:cNvPr id="24" name="Text 22"/>
+          <p:cNvSpPr txBox="1"/>
+          <p:nvPr/>
+        </p:nvSpPr>
+        <p:spPr>
+          <a:xfrm>
+            <a:off x="8389620" y="3872484"/>
+            <a:ext cx="347472" cy="347472"/>
+          </a:xfrm>
+          <a:prstGeom prst="rect">
+            <a:avLst/>
+          </a:prstGeom>
+          <a:noFill/>
+          <a:ln/>
+        </p:spPr>
+        <p:txBody>
+          <a:bodyPr wrap="square" lIns="0" tIns="0" rIns="0" bIns="0" rtlCol="0" anchor="ctr">
+            <a:normAutofit/>
+          </a:bodyPr>
+          <a:lstStyle/>
+          <a:p>
+            <a:pPr algn="ctr" indent="0" marL="0">
+              <a:buNone/>
+            </a:pPr>
+            <a:r>
+              <a:rPr lang="en-US" sz="1000" b="1" dirty="0">
+                <a:solidFill>
+                  <a:srgbClr val="FFFFFF"/>
+                </a:solidFill>
+                <a:latin typeface="BIZ UDPGothic" pitchFamily="34" charset="0"/>
+                <a:ea typeface="BIZ UDPGothic" pitchFamily="34" charset="-122"/>
+                <a:cs typeface="BIZ UDPGothic" pitchFamily="34" charset="-120"/>
+              </a:rPr>
+              <a:t>4</a:t>
+            </a:r>
+            <a:endParaRPr lang="en-US" sz="1000" dirty="0"/>
+          </a:p>
+        </p:txBody>
+      </p:sp>
+      <p:sp>
+        <p:nvSpPr>
+          <p:cNvPr id="25" name="Text 23"/>
+          <p:cNvSpPr txBox="1"/>
+          <p:nvPr/>
+        </p:nvSpPr>
+        <p:spPr>
+          <a:xfrm>
+            <a:off x="8892540" y="2834640"/>
+            <a:ext cx="1783080" cy="2423160"/>
           </a:xfrm>
           <a:prstGeom prst="rect">
             <a:avLst/>
@@ -4158,383 +5621,38 @@
           </a:bodyPr>
           <a:lstStyle/>
           <a:p>
-            <a:pPr algn="ctr" indent="0" marL="0">
-              <a:buNone/>
-            </a:pPr>
-            <a:r>
-              <a:rPr lang="en-US" sz="900" b="1" dirty="0">
-                <a:solidFill>
-                  <a:srgbClr val="FFFFFF"/>
-                </a:solidFill>
-                <a:latin typeface="Noto Sans CJK JP" pitchFamily="34" charset="0"/>
-                <a:ea typeface="Noto Sans CJK JP" pitchFamily="34" charset="-122"/>
-                <a:cs typeface="Noto Sans CJK JP" pitchFamily="34" charset="-120"/>
-              </a:rPr>
-              <a:t>1</a:t>
-            </a:r>
-            <a:endParaRPr lang="en-US" sz="900" dirty="0"/>
-          </a:p>
-        </p:txBody>
-      </p:sp>
-      <p:sp>
-        <p:nvSpPr>
-          <p:cNvPr id="16" name="Text 14"/>
-          <p:cNvSpPr txBox="1"/>
-          <p:nvPr/>
-        </p:nvSpPr>
-        <p:spPr>
-          <a:xfrm>
-            <a:off x="1463040" y="3127248"/>
-            <a:ext cx="8823960" cy="354330"/>
-          </a:xfrm>
-          <a:prstGeom prst="rect">
-            <a:avLst/>
-          </a:prstGeom>
-          <a:noFill/>
-          <a:ln/>
-        </p:spPr>
-        <p:txBody>
-          <a:bodyPr wrap="square" lIns="254" tIns="254" rIns="254" bIns="254" rtlCol="0" anchor="ctr">
-            <a:normAutofit/>
-          </a:bodyPr>
-          <a:lstStyle/>
-          <a:p>
             <a:pPr algn="l" indent="0" marL="0">
               <a:buNone/>
             </a:pPr>
             <a:r>
-              <a:rPr lang="en-US" sz="1460" dirty="0">
+              <a:rPr lang="en-US" sz="1800" dirty="0">
                 <a:solidFill>
                   <a:srgbClr val="111111"/>
                 </a:solidFill>
-                <a:latin typeface="Noto Sans CJK JP" pitchFamily="34" charset="0"/>
-                <a:ea typeface="Noto Sans CJK JP" pitchFamily="34" charset="-122"/>
-                <a:cs typeface="Noto Sans CJK JP" pitchFamily="34" charset="-120"/>
-              </a:rPr>
-              <a:t>選書</a:t>
-            </a:r>
-            <a:endParaRPr lang="en-US" sz="1460" dirty="0"/>
-          </a:p>
-        </p:txBody>
-      </p:sp>
-      <p:sp>
-        <p:nvSpPr>
-          <p:cNvPr id="17" name="Shape 15"/>
-          <p:cNvSpPr/>
-          <p:nvPr/>
-        </p:nvSpPr>
-        <p:spPr>
-          <a:xfrm>
-            <a:off x="960120" y="3710178"/>
-            <a:ext cx="347472" cy="347472"/>
-          </a:xfrm>
-          <a:prstGeom prst="ellipse">
-            <a:avLst/>
-          </a:prstGeom>
-          <a:solidFill>
-            <a:srgbClr val="E9E0D1"/>
-          </a:solidFill>
-          <a:ln w="8890">
-            <a:solidFill>
-              <a:srgbClr val="D7CCB9"/>
-            </a:solidFill>
-            <a:prstDash val="solid"/>
-          </a:ln>
-        </p:spPr>
-      </p:sp>
-      <p:sp>
-        <p:nvSpPr>
-          <p:cNvPr id="18" name="Text 16"/>
-          <p:cNvSpPr txBox="1"/>
-          <p:nvPr/>
-        </p:nvSpPr>
-        <p:spPr>
-          <a:xfrm>
-            <a:off x="960120" y="3783330"/>
-            <a:ext cx="347472" cy="137160"/>
-          </a:xfrm>
-          <a:prstGeom prst="rect">
-            <a:avLst/>
-          </a:prstGeom>
-          <a:noFill/>
-          <a:ln/>
-        </p:spPr>
-        <p:txBody>
-          <a:bodyPr wrap="square" lIns="254" tIns="254" rIns="254" bIns="254" rtlCol="0" anchor="ctr">
-            <a:normAutofit/>
-          </a:bodyPr>
-          <a:lstStyle/>
-          <a:p>
-            <a:pPr algn="ctr" indent="0" marL="0">
-              <a:buNone/>
-            </a:pPr>
-            <a:r>
-              <a:rPr lang="en-US" sz="900" b="1" dirty="0">
-                <a:solidFill>
-                  <a:srgbClr val="C2410C"/>
-                </a:solidFill>
-                <a:latin typeface="Noto Sans CJK JP" pitchFamily="34" charset="0"/>
-                <a:ea typeface="Noto Sans CJK JP" pitchFamily="34" charset="-122"/>
-                <a:cs typeface="Noto Sans CJK JP" pitchFamily="34" charset="-120"/>
-              </a:rPr>
-              <a:t>2</a:t>
-            </a:r>
-            <a:endParaRPr lang="en-US" sz="900" dirty="0"/>
-          </a:p>
-        </p:txBody>
-      </p:sp>
-      <p:sp>
-        <p:nvSpPr>
-          <p:cNvPr id="19" name="Text 17"/>
-          <p:cNvSpPr txBox="1"/>
-          <p:nvPr/>
-        </p:nvSpPr>
-        <p:spPr>
-          <a:xfrm>
-            <a:off x="1463040" y="3664458"/>
-            <a:ext cx="8823960" cy="354330"/>
-          </a:xfrm>
-          <a:prstGeom prst="rect">
-            <a:avLst/>
-          </a:prstGeom>
-          <a:noFill/>
-          <a:ln/>
-        </p:spPr>
-        <p:txBody>
-          <a:bodyPr wrap="square" lIns="254" tIns="254" rIns="254" bIns="254" rtlCol="0" anchor="ctr">
-            <a:normAutofit/>
-          </a:bodyPr>
-          <a:lstStyle/>
+                <a:latin typeface="BIZ UDPGothic" pitchFamily="34" charset="0"/>
+                <a:ea typeface="BIZ UDPGothic" pitchFamily="34" charset="-122"/>
+                <a:cs typeface="BIZ UDPGothic" pitchFamily="34" charset="-120"/>
+              </a:rPr>
+              <a:t>頁を見せ合い</a:t>
+            </a:r>
+            <a:endParaRPr lang="en-US" sz="1800" dirty="0"/>
+          </a:p>
           <a:p>
             <a:pPr algn="l" indent="0" marL="0">
               <a:buNone/>
             </a:pPr>
             <a:r>
-              <a:rPr lang="en-US" sz="1460" dirty="0">
+              <a:rPr lang="en-US" sz="1800" dirty="0">
                 <a:solidFill>
                   <a:srgbClr val="111111"/>
                 </a:solidFill>
-                <a:latin typeface="Noto Sans CJK JP" pitchFamily="34" charset="0"/>
-                <a:ea typeface="Noto Sans CJK JP" pitchFamily="34" charset="-122"/>
-                <a:cs typeface="Noto Sans CJK JP" pitchFamily="34" charset="-120"/>
-              </a:rPr>
-              <a:t>街歩き</a:t>
-            </a:r>
-            <a:endParaRPr lang="en-US" sz="1460" dirty="0"/>
-          </a:p>
-        </p:txBody>
-      </p:sp>
-      <p:sp>
-        <p:nvSpPr>
-          <p:cNvPr id="20" name="Shape 18"/>
-          <p:cNvSpPr/>
-          <p:nvPr/>
-        </p:nvSpPr>
-        <p:spPr>
-          <a:xfrm>
-            <a:off x="960120" y="4247388"/>
-            <a:ext cx="347472" cy="347472"/>
-          </a:xfrm>
-          <a:prstGeom prst="ellipse">
-            <a:avLst/>
-          </a:prstGeom>
-          <a:solidFill>
-            <a:srgbClr val="E9E0D1"/>
-          </a:solidFill>
-          <a:ln w="8890">
-            <a:solidFill>
-              <a:srgbClr val="D7CCB9"/>
-            </a:solidFill>
-            <a:prstDash val="solid"/>
-          </a:ln>
-        </p:spPr>
-      </p:sp>
-      <p:sp>
-        <p:nvSpPr>
-          <p:cNvPr id="21" name="Text 19"/>
-          <p:cNvSpPr txBox="1"/>
-          <p:nvPr/>
-        </p:nvSpPr>
-        <p:spPr>
-          <a:xfrm>
-            <a:off x="960120" y="4320540"/>
-            <a:ext cx="347472" cy="137160"/>
-          </a:xfrm>
-          <a:prstGeom prst="rect">
-            <a:avLst/>
-          </a:prstGeom>
-          <a:noFill/>
-          <a:ln/>
-        </p:spPr>
-        <p:txBody>
-          <a:bodyPr wrap="square" lIns="254" tIns="254" rIns="254" bIns="254" rtlCol="0" anchor="ctr">
-            <a:normAutofit/>
-          </a:bodyPr>
-          <a:lstStyle/>
-          <a:p>
-            <a:pPr algn="ctr" indent="0" marL="0">
-              <a:buNone/>
-            </a:pPr>
-            <a:r>
-              <a:rPr lang="en-US" sz="900" b="1" dirty="0">
-                <a:solidFill>
-                  <a:srgbClr val="C2410C"/>
-                </a:solidFill>
-                <a:latin typeface="Noto Sans CJK JP" pitchFamily="34" charset="0"/>
-                <a:ea typeface="Noto Sans CJK JP" pitchFamily="34" charset="-122"/>
-                <a:cs typeface="Noto Sans CJK JP" pitchFamily="34" charset="-120"/>
-              </a:rPr>
-              <a:t>3</a:t>
-            </a:r>
-            <a:endParaRPr lang="en-US" sz="900" dirty="0"/>
-          </a:p>
-        </p:txBody>
-      </p:sp>
-      <p:sp>
-        <p:nvSpPr>
-          <p:cNvPr id="22" name="Text 20"/>
-          <p:cNvSpPr txBox="1"/>
-          <p:nvPr/>
-        </p:nvSpPr>
-        <p:spPr>
-          <a:xfrm>
-            <a:off x="1463040" y="4201668"/>
-            <a:ext cx="8823960" cy="354330"/>
-          </a:xfrm>
-          <a:prstGeom prst="rect">
-            <a:avLst/>
-          </a:prstGeom>
-          <a:noFill/>
-          <a:ln/>
-        </p:spPr>
-        <p:txBody>
-          <a:bodyPr wrap="square" lIns="254" tIns="254" rIns="254" bIns="254" rtlCol="0" anchor="ctr">
-            <a:normAutofit/>
-          </a:bodyPr>
-          <a:lstStyle/>
-          <a:p>
-            <a:pPr algn="l" indent="0" marL="0">
-              <a:buNone/>
-            </a:pPr>
-            <a:r>
-              <a:rPr lang="en-US" sz="1460" dirty="0">
-                <a:solidFill>
-                  <a:srgbClr val="111111"/>
-                </a:solidFill>
-                <a:latin typeface="Noto Sans CJK JP" pitchFamily="34" charset="0"/>
-                <a:ea typeface="Noto Sans CJK JP" pitchFamily="34" charset="-122"/>
-                <a:cs typeface="Noto Sans CJK JP" pitchFamily="34" charset="-120"/>
-              </a:rPr>
-              <a:t>編集</a:t>
-            </a:r>
-            <a:endParaRPr lang="en-US" sz="1460" dirty="0"/>
-          </a:p>
-        </p:txBody>
-      </p:sp>
-      <p:sp>
-        <p:nvSpPr>
-          <p:cNvPr id="23" name="Shape 21"/>
-          <p:cNvSpPr/>
-          <p:nvPr/>
-        </p:nvSpPr>
-        <p:spPr>
-          <a:xfrm>
-            <a:off x="960120" y="4784598"/>
-            <a:ext cx="347472" cy="347472"/>
-          </a:xfrm>
-          <a:prstGeom prst="ellipse">
-            <a:avLst/>
-          </a:prstGeom>
-          <a:solidFill>
-            <a:srgbClr val="E9E0D1"/>
-          </a:solidFill>
-          <a:ln w="8890">
-            <a:solidFill>
-              <a:srgbClr val="D7CCB9"/>
-            </a:solidFill>
-            <a:prstDash val="solid"/>
-          </a:ln>
-        </p:spPr>
-      </p:sp>
-      <p:sp>
-        <p:nvSpPr>
-          <p:cNvPr id="24" name="Text 22"/>
-          <p:cNvSpPr txBox="1"/>
-          <p:nvPr/>
-        </p:nvSpPr>
-        <p:spPr>
-          <a:xfrm>
-            <a:off x="960120" y="4857750"/>
-            <a:ext cx="347472" cy="137160"/>
-          </a:xfrm>
-          <a:prstGeom prst="rect">
-            <a:avLst/>
-          </a:prstGeom>
-          <a:noFill/>
-          <a:ln/>
-        </p:spPr>
-        <p:txBody>
-          <a:bodyPr wrap="square" lIns="254" tIns="254" rIns="254" bIns="254" rtlCol="0" anchor="ctr">
-            <a:normAutofit/>
-          </a:bodyPr>
-          <a:lstStyle/>
-          <a:p>
-            <a:pPr algn="ctr" indent="0" marL="0">
-              <a:buNone/>
-            </a:pPr>
-            <a:r>
-              <a:rPr lang="en-US" sz="900" b="1" dirty="0">
-                <a:solidFill>
-                  <a:srgbClr val="C2410C"/>
-                </a:solidFill>
-                <a:latin typeface="Noto Sans CJK JP" pitchFamily="34" charset="0"/>
-                <a:ea typeface="Noto Sans CJK JP" pitchFamily="34" charset="-122"/>
-                <a:cs typeface="Noto Sans CJK JP" pitchFamily="34" charset="-120"/>
-              </a:rPr>
-              <a:t>4</a:t>
-            </a:r>
-            <a:endParaRPr lang="en-US" sz="900" dirty="0"/>
-          </a:p>
-        </p:txBody>
-      </p:sp>
-      <p:sp>
-        <p:nvSpPr>
-          <p:cNvPr id="25" name="Text 23"/>
-          <p:cNvSpPr txBox="1"/>
-          <p:nvPr/>
-        </p:nvSpPr>
-        <p:spPr>
-          <a:xfrm>
-            <a:off x="1463040" y="4738878"/>
-            <a:ext cx="8823960" cy="354330"/>
-          </a:xfrm>
-          <a:prstGeom prst="rect">
-            <a:avLst/>
-          </a:prstGeom>
-          <a:noFill/>
-          <a:ln/>
-        </p:spPr>
-        <p:txBody>
-          <a:bodyPr wrap="square" lIns="254" tIns="254" rIns="254" bIns="254" rtlCol="0" anchor="ctr">
-            <a:normAutofit/>
-          </a:bodyPr>
-          <a:lstStyle/>
-          <a:p>
-            <a:pPr algn="l" indent="0" marL="0">
-              <a:buNone/>
-            </a:pPr>
-            <a:r>
-              <a:rPr lang="en-US" sz="1460" dirty="0">
-                <a:solidFill>
-                  <a:srgbClr val="111111"/>
-                </a:solidFill>
-                <a:latin typeface="Noto Sans CJK JP" pitchFamily="34" charset="0"/>
-                <a:ea typeface="Noto Sans CJK JP" pitchFamily="34" charset="-122"/>
-                <a:cs typeface="Noto Sans CJK JP" pitchFamily="34" charset="-120"/>
-              </a:rPr>
-              <a:t>共有</a:t>
-            </a:r>
-            <a:endParaRPr lang="en-US" sz="1460" dirty="0"/>
+                <a:latin typeface="BIZ UDPGothic" pitchFamily="34" charset="0"/>
+                <a:ea typeface="BIZ UDPGothic" pitchFamily="34" charset="-122"/>
+                <a:cs typeface="BIZ UDPGothic" pitchFamily="34" charset="-120"/>
+              </a:rPr>
+              <a:t>感想を話す</a:t>
+            </a:r>
+            <a:endParaRPr lang="en-US" sz="1800" dirty="0"/>
           </a:p>
         </p:txBody>
       </p:sp>
@@ -4601,9 +5719,9 @@
                 <a:solidFill>
                   <a:srgbClr val="111111"/>
                 </a:solidFill>
-                <a:latin typeface="Noto Serif CJK JP" pitchFamily="34" charset="0"/>
-                <a:ea typeface="Noto Serif CJK JP" pitchFamily="34" charset="-122"/>
-                <a:cs typeface="Noto Serif CJK JP" pitchFamily="34" charset="-120"/>
+                <a:latin typeface="Shippori Mincho" pitchFamily="34" charset="0"/>
+                <a:ea typeface="Shippori Mincho" pitchFamily="34" charset="-122"/>
+                <a:cs typeface="Shippori Mincho" pitchFamily="34" charset="-120"/>
               </a:rPr>
               <a:t>4週間の試行計画</a:t>
             </a:r>
@@ -4663,9 +5781,9 @@
                 <a:solidFill>
                   <a:srgbClr val="665F58"/>
                 </a:solidFill>
-                <a:latin typeface="DejaVu Sans" pitchFamily="34" charset="0"/>
-                <a:ea typeface="DejaVu Sans" pitchFamily="34" charset="-122"/>
-                <a:cs typeface="DejaVu Sans" pitchFamily="34" charset="-120"/>
+                <a:latin typeface="Manrope" pitchFamily="34" charset="0"/>
+                <a:ea typeface="Manrope" pitchFamily="34" charset="-122"/>
+                <a:cs typeface="Manrope" pitchFamily="34" charset="-120"/>
               </a:rPr>
               <a:t>07 / 08</a:t>
             </a:r>
@@ -4681,7 +5799,7 @@
         </p:nvSpPr>
         <p:spPr>
           <a:xfrm>
-            <a:off x="1097280" y="2788920"/>
+            <a:off x="1097280" y="2423160"/>
             <a:ext cx="9601200" cy="0"/>
           </a:xfrm>
           <a:prstGeom prst="line">
@@ -4704,7 +5822,7 @@
         </p:nvSpPr>
         <p:spPr>
           <a:xfrm>
-            <a:off x="1005840" y="2697480"/>
+            <a:off x="1600200" y="2331720"/>
             <a:ext cx="182880" cy="182880"/>
           </a:xfrm>
           <a:prstGeom prst="ellipse">
@@ -4729,7 +5847,7 @@
         </p:nvSpPr>
         <p:spPr>
           <a:xfrm>
-            <a:off x="877824" y="2258568"/>
+            <a:off x="1472184" y="1892808"/>
             <a:ext cx="438912" cy="182880"/>
           </a:xfrm>
           <a:prstGeom prst="rect">
@@ -4752,9 +5870,9 @@
                 <a:solidFill>
                   <a:srgbClr val="C2410C"/>
                 </a:solidFill>
-                <a:latin typeface="Noto Sans CJK JP" pitchFamily="34" charset="0"/>
-                <a:ea typeface="Noto Sans CJK JP" pitchFamily="34" charset="-122"/>
-                <a:cs typeface="Noto Sans CJK JP" pitchFamily="34" charset="-120"/>
+                <a:latin typeface="BIZ UDPGothic" pitchFamily="34" charset="0"/>
+                <a:ea typeface="BIZ UDPGothic" pitchFamily="34" charset="-122"/>
+                <a:cs typeface="BIZ UDPGothic" pitchFamily="34" charset="-120"/>
               </a:rPr>
               <a:t>01</a:t>
             </a:r>
@@ -4770,53 +5888,70 @@
         </p:nvSpPr>
         <p:spPr>
           <a:xfrm>
-            <a:off x="502920" y="3118104"/>
-            <a:ext cx="1371600" cy="685800"/>
-          </a:xfrm>
-          <a:prstGeom prst="rect">
-            <a:avLst/>
-          </a:prstGeom>
-          <a:noFill/>
-          <a:ln/>
-        </p:spPr>
-        <p:txBody>
-          <a:bodyPr wrap="square" lIns="254" tIns="254" rIns="254" bIns="254" rtlCol="0" anchor="ctr">
-            <a:normAutofit/>
-          </a:bodyPr>
-          <a:lstStyle/>
-          <a:p>
-            <a:pPr algn="l" indent="0" marL="0">
-              <a:buNone/>
-            </a:pPr>
-            <a:r>
-              <a:rPr lang="en-US" sz="1280" dirty="0">
+            <a:off x="731520" y="2752344"/>
+            <a:ext cx="1920240" cy="1600200"/>
+          </a:xfrm>
+          <a:prstGeom prst="rect">
+            <a:avLst/>
+          </a:prstGeom>
+          <a:noFill/>
+          <a:ln/>
+        </p:spPr>
+        <p:txBody>
+          <a:bodyPr wrap="square" lIns="254" tIns="254" rIns="254" bIns="254" rtlCol="0" anchor="t">
+            <a:normAutofit/>
+          </a:bodyPr>
+          <a:lstStyle/>
+          <a:p>
+            <a:pPr algn="ctr" indent="0" marL="0">
+              <a:buNone/>
+            </a:pPr>
+            <a:r>
+              <a:rPr lang="en-US" sz="1700" dirty="0">
                 <a:solidFill>
                   <a:srgbClr val="111111"/>
                 </a:solidFill>
-                <a:latin typeface="Noto Sans CJK JP" pitchFamily="34" charset="0"/>
-                <a:ea typeface="Noto Sans CJK JP" pitchFamily="34" charset="-122"/>
-                <a:cs typeface="Noto Sans CJK JP" pitchFamily="34" charset="-120"/>
+                <a:latin typeface="BIZ UDPGothic" pitchFamily="34" charset="0"/>
+                <a:ea typeface="BIZ UDPGothic" pitchFamily="34" charset="-122"/>
+                <a:cs typeface="BIZ UDPGothic" pitchFamily="34" charset="-120"/>
               </a:rPr>
               <a:t>第1週</a:t>
             </a:r>
-            <a:endParaRPr lang="en-US" sz="1280" dirty="0"/>
-          </a:p>
-          <a:p>
-            <a:pPr algn="l" indent="0" marL="0">
-              <a:buNone/>
-            </a:pPr>
-            <a:r>
-              <a:rPr lang="en-US" sz="1280" dirty="0">
+            <a:endParaRPr lang="en-US" sz="1700" dirty="0"/>
+          </a:p>
+          <a:p>
+            <a:pPr algn="ctr" indent="0" marL="0">
+              <a:buNone/>
+            </a:pPr>
+            <a:r>
+              <a:rPr lang="en-US" sz="1700" dirty="0">
                 <a:solidFill>
                   <a:srgbClr val="111111"/>
                 </a:solidFill>
-                <a:latin typeface="Noto Sans CJK JP" pitchFamily="34" charset="0"/>
-                <a:ea typeface="Noto Sans CJK JP" pitchFamily="34" charset="-122"/>
-                <a:cs typeface="Noto Sans CJK JP" pitchFamily="34" charset="-120"/>
-              </a:rPr>
-              <a:t>協力書店と設計</a:t>
-            </a:r>
-            <a:endParaRPr lang="en-US" sz="1280" dirty="0"/>
+                <a:latin typeface="BIZ UDPGothic" pitchFamily="34" charset="0"/>
+                <a:ea typeface="BIZ UDPGothic" pitchFamily="34" charset="-122"/>
+                <a:cs typeface="BIZ UDPGothic" pitchFamily="34" charset="-120"/>
+              </a:rPr>
+              <a:t>書店と設計</a:t>
+            </a:r>
+            <a:endParaRPr lang="en-US" sz="1700" dirty="0"/>
+          </a:p>
+          <a:p>
+            <a:pPr algn="ctr" indent="0" marL="0">
+              <a:buNone/>
+            </a:pPr>
+            <a:r>
+              <a:rPr lang="en-US" sz="1700" dirty="0">
+                <a:solidFill>
+                  <a:srgbClr val="111111"/>
+                </a:solidFill>
+                <a:latin typeface="BIZ UDPGothic" pitchFamily="34" charset="0"/>
+                <a:ea typeface="BIZ UDPGothic" pitchFamily="34" charset="-122"/>
+                <a:cs typeface="BIZ UDPGothic" pitchFamily="34" charset="-120"/>
+              </a:rPr>
+              <a:t>運営条件の案</a:t>
+            </a:r>
+            <a:endParaRPr lang="en-US" sz="1700" dirty="0"/>
           </a:p>
         </p:txBody>
       </p:sp>
@@ -4828,7 +5963,7 @@
         </p:nvSpPr>
         <p:spPr>
           <a:xfrm>
-            <a:off x="3337560" y="2697480"/>
+            <a:off x="4142232" y="2331720"/>
             <a:ext cx="182880" cy="182880"/>
           </a:xfrm>
           <a:prstGeom prst="ellipse">
@@ -4853,7 +5988,7 @@
         </p:nvSpPr>
         <p:spPr>
           <a:xfrm>
-            <a:off x="3209544" y="2258568"/>
+            <a:off x="4014216" y="1892808"/>
             <a:ext cx="438912" cy="182880"/>
           </a:xfrm>
           <a:prstGeom prst="rect">
@@ -4876,9 +6011,9 @@
                 <a:solidFill>
                   <a:srgbClr val="C2410C"/>
                 </a:solidFill>
-                <a:latin typeface="Noto Sans CJK JP" pitchFamily="34" charset="0"/>
-                <a:ea typeface="Noto Sans CJK JP" pitchFamily="34" charset="-122"/>
-                <a:cs typeface="Noto Sans CJK JP" pitchFamily="34" charset="-120"/>
+                <a:latin typeface="BIZ UDPGothic" pitchFamily="34" charset="0"/>
+                <a:ea typeface="BIZ UDPGothic" pitchFamily="34" charset="-122"/>
+                <a:cs typeface="BIZ UDPGothic" pitchFamily="34" charset="-120"/>
               </a:rPr>
               <a:t>02</a:t>
             </a:r>
@@ -4894,53 +6029,70 @@
         </p:nvSpPr>
         <p:spPr>
           <a:xfrm>
-            <a:off x="2834640" y="3118104"/>
-            <a:ext cx="1371600" cy="685800"/>
-          </a:xfrm>
-          <a:prstGeom prst="rect">
-            <a:avLst/>
-          </a:prstGeom>
-          <a:noFill/>
-          <a:ln/>
-        </p:spPr>
-        <p:txBody>
-          <a:bodyPr wrap="square" lIns="254" tIns="254" rIns="254" bIns="254" rtlCol="0" anchor="ctr">
-            <a:normAutofit/>
-          </a:bodyPr>
-          <a:lstStyle/>
-          <a:p>
-            <a:pPr algn="l" indent="0" marL="0">
-              <a:buNone/>
-            </a:pPr>
-            <a:r>
-              <a:rPr lang="en-US" sz="1280" dirty="0">
+            <a:off x="3273552" y="2752344"/>
+            <a:ext cx="1920240" cy="1600200"/>
+          </a:xfrm>
+          <a:prstGeom prst="rect">
+            <a:avLst/>
+          </a:prstGeom>
+          <a:noFill/>
+          <a:ln/>
+        </p:spPr>
+        <p:txBody>
+          <a:bodyPr wrap="square" lIns="254" tIns="254" rIns="254" bIns="254" rtlCol="0" anchor="t">
+            <a:normAutofit/>
+          </a:bodyPr>
+          <a:lstStyle/>
+          <a:p>
+            <a:pPr algn="ctr" indent="0" marL="0">
+              <a:buNone/>
+            </a:pPr>
+            <a:r>
+              <a:rPr lang="en-US" sz="1700" dirty="0">
                 <a:solidFill>
                   <a:srgbClr val="111111"/>
                 </a:solidFill>
-                <a:latin typeface="Noto Sans CJK JP" pitchFamily="34" charset="0"/>
-                <a:ea typeface="Noto Sans CJK JP" pitchFamily="34" charset="-122"/>
-                <a:cs typeface="Noto Sans CJK JP" pitchFamily="34" charset="-120"/>
+                <a:latin typeface="BIZ UDPGothic" pitchFamily="34" charset="0"/>
+                <a:ea typeface="BIZ UDPGothic" pitchFamily="34" charset="-122"/>
+                <a:cs typeface="BIZ UDPGothic" pitchFamily="34" charset="-120"/>
               </a:rPr>
               <a:t>第2週</a:t>
             </a:r>
-            <a:endParaRPr lang="en-US" sz="1280" dirty="0"/>
-          </a:p>
-          <a:p>
-            <a:pPr algn="l" indent="0" marL="0">
-              <a:buNone/>
-            </a:pPr>
-            <a:r>
-              <a:rPr lang="en-US" sz="1280" dirty="0">
+            <a:endParaRPr lang="en-US" sz="1700" dirty="0"/>
+          </a:p>
+          <a:p>
+            <a:pPr algn="ctr" indent="0" marL="0">
+              <a:buNone/>
+            </a:pPr>
+            <a:r>
+              <a:rPr lang="en-US" sz="1700" dirty="0">
                 <a:solidFill>
                   <a:srgbClr val="111111"/>
                 </a:solidFill>
-                <a:latin typeface="Noto Sans CJK JP" pitchFamily="34" charset="0"/>
-                <a:ea typeface="Noto Sans CJK JP" pitchFamily="34" charset="-122"/>
-                <a:cs typeface="Noto Sans CJK JP" pitchFamily="34" charset="-120"/>
-              </a:rPr>
-              <a:t>選書と参加募集</a:t>
-            </a:r>
-            <a:endParaRPr lang="en-US" sz="1280" dirty="0"/>
+                <a:latin typeface="BIZ UDPGothic" pitchFamily="34" charset="0"/>
+                <a:ea typeface="BIZ UDPGothic" pitchFamily="34" charset="-122"/>
+                <a:cs typeface="BIZ UDPGothic" pitchFamily="34" charset="-120"/>
+              </a:rPr>
+              <a:t>参加を募る</a:t>
+            </a:r>
+            <a:endParaRPr lang="en-US" sz="1700" dirty="0"/>
+          </a:p>
+          <a:p>
+            <a:pPr algn="ctr" indent="0" marL="0">
+              <a:buNone/>
+            </a:pPr>
+            <a:r>
+              <a:rPr lang="en-US" sz="1700" dirty="0">
+                <a:solidFill>
+                  <a:srgbClr val="111111"/>
+                </a:solidFill>
+                <a:latin typeface="BIZ UDPGothic" pitchFamily="34" charset="0"/>
+                <a:ea typeface="BIZ UDPGothic" pitchFamily="34" charset="-122"/>
+                <a:cs typeface="BIZ UDPGothic" pitchFamily="34" charset="-120"/>
+              </a:rPr>
+              <a:t>本と募集案内</a:t>
+            </a:r>
+            <a:endParaRPr lang="en-US" sz="1700" dirty="0"/>
           </a:p>
         </p:txBody>
       </p:sp>
@@ -4952,7 +6104,7 @@
         </p:nvSpPr>
         <p:spPr>
           <a:xfrm>
-            <a:off x="5669280" y="2697480"/>
+            <a:off x="6684264" y="2331720"/>
             <a:ext cx="182880" cy="182880"/>
           </a:xfrm>
           <a:prstGeom prst="ellipse">
@@ -4977,7 +6129,7 @@
         </p:nvSpPr>
         <p:spPr>
           <a:xfrm>
-            <a:off x="5541264" y="2258568"/>
+            <a:off x="6556248" y="1892808"/>
             <a:ext cx="438912" cy="182880"/>
           </a:xfrm>
           <a:prstGeom prst="rect">
@@ -5000,9 +6152,9 @@
                 <a:solidFill>
                   <a:srgbClr val="C2410C"/>
                 </a:solidFill>
-                <a:latin typeface="Noto Sans CJK JP" pitchFamily="34" charset="0"/>
-                <a:ea typeface="Noto Sans CJK JP" pitchFamily="34" charset="-122"/>
-                <a:cs typeface="Noto Sans CJK JP" pitchFamily="34" charset="-120"/>
+                <a:latin typeface="BIZ UDPGothic" pitchFamily="34" charset="0"/>
+                <a:ea typeface="BIZ UDPGothic" pitchFamily="34" charset="-122"/>
+                <a:cs typeface="BIZ UDPGothic" pitchFamily="34" charset="-120"/>
               </a:rPr>
               <a:t>03</a:t>
             </a:r>
@@ -5018,53 +6170,70 @@
         </p:nvSpPr>
         <p:spPr>
           <a:xfrm>
-            <a:off x="5166360" y="3118104"/>
-            <a:ext cx="1371600" cy="685800"/>
-          </a:xfrm>
-          <a:prstGeom prst="rect">
-            <a:avLst/>
-          </a:prstGeom>
-          <a:noFill/>
-          <a:ln/>
-        </p:spPr>
-        <p:txBody>
-          <a:bodyPr wrap="square" lIns="254" tIns="254" rIns="254" bIns="254" rtlCol="0" anchor="ctr">
-            <a:normAutofit/>
-          </a:bodyPr>
-          <a:lstStyle/>
-          <a:p>
-            <a:pPr algn="l" indent="0" marL="0">
-              <a:buNone/>
-            </a:pPr>
-            <a:r>
-              <a:rPr lang="en-US" sz="1280" dirty="0">
+            <a:off x="5815584" y="2752344"/>
+            <a:ext cx="1920240" cy="1600200"/>
+          </a:xfrm>
+          <a:prstGeom prst="rect">
+            <a:avLst/>
+          </a:prstGeom>
+          <a:noFill/>
+          <a:ln/>
+        </p:spPr>
+        <p:txBody>
+          <a:bodyPr wrap="square" lIns="254" tIns="254" rIns="254" bIns="254" rtlCol="0" anchor="t">
+            <a:normAutofit/>
+          </a:bodyPr>
+          <a:lstStyle/>
+          <a:p>
+            <a:pPr algn="ctr" indent="0" marL="0">
+              <a:buNone/>
+            </a:pPr>
+            <a:r>
+              <a:rPr lang="en-US" sz="1700" dirty="0">
                 <a:solidFill>
                   <a:srgbClr val="111111"/>
                 </a:solidFill>
-                <a:latin typeface="Noto Sans CJK JP" pitchFamily="34" charset="0"/>
-                <a:ea typeface="Noto Sans CJK JP" pitchFamily="34" charset="-122"/>
-                <a:cs typeface="Noto Sans CJK JP" pitchFamily="34" charset="-120"/>
+                <a:latin typeface="BIZ UDPGothic" pitchFamily="34" charset="0"/>
+                <a:ea typeface="BIZ UDPGothic" pitchFamily="34" charset="-122"/>
+                <a:cs typeface="BIZ UDPGothic" pitchFamily="34" charset="-120"/>
               </a:rPr>
               <a:t>第3週</a:t>
             </a:r>
-            <a:endParaRPr lang="en-US" sz="1280" dirty="0"/>
-          </a:p>
-          <a:p>
-            <a:pPr algn="l" indent="0" marL="0">
-              <a:buNone/>
-            </a:pPr>
-            <a:r>
-              <a:rPr lang="en-US" sz="1280" dirty="0">
+            <a:endParaRPr lang="en-US" sz="1700" dirty="0"/>
+          </a:p>
+          <a:p>
+            <a:pPr algn="ctr" indent="0" marL="0">
+              <a:buNone/>
+            </a:pPr>
+            <a:r>
+              <a:rPr lang="en-US" sz="1700" dirty="0">
                 <a:solidFill>
                   <a:srgbClr val="111111"/>
                 </a:solidFill>
-                <a:latin typeface="Noto Sans CJK JP" pitchFamily="34" charset="0"/>
-                <a:ea typeface="Noto Sans CJK JP" pitchFamily="34" charset="-122"/>
-                <a:cs typeface="Noto Sans CJK JP" pitchFamily="34" charset="-120"/>
-              </a:rPr>
-              <a:t>週末編集室を試行</a:t>
-            </a:r>
-            <a:endParaRPr lang="en-US" sz="1280" dirty="0"/>
+                <a:latin typeface="BIZ UDPGothic" pitchFamily="34" charset="0"/>
+                <a:ea typeface="BIZ UDPGothic" pitchFamily="34" charset="-122"/>
+                <a:cs typeface="BIZ UDPGothic" pitchFamily="34" charset="-120"/>
+              </a:rPr>
+              <a:t>編集室を試す</a:t>
+            </a:r>
+            <a:endParaRPr lang="en-US" sz="1700" dirty="0"/>
+          </a:p>
+          <a:p>
+            <a:pPr algn="ctr" indent="0" marL="0">
+              <a:buNone/>
+            </a:pPr>
+            <a:r>
+              <a:rPr lang="en-US" sz="1700" dirty="0">
+                <a:solidFill>
+                  <a:srgbClr val="111111"/>
+                </a:solidFill>
+                <a:latin typeface="BIZ UDPGothic" pitchFamily="34" charset="0"/>
+                <a:ea typeface="BIZ UDPGothic" pitchFamily="34" charset="-122"/>
+                <a:cs typeface="BIZ UDPGothic" pitchFamily="34" charset="-120"/>
+              </a:rPr>
+              <a:t>写真と短文</a:t>
+            </a:r>
+            <a:endParaRPr lang="en-US" sz="1700" dirty="0"/>
           </a:p>
         </p:txBody>
       </p:sp>
@@ -5076,7 +6245,7 @@
         </p:nvSpPr>
         <p:spPr>
           <a:xfrm>
-            <a:off x="8001000" y="2697480"/>
+            <a:off x="9226296" y="2331720"/>
             <a:ext cx="182880" cy="182880"/>
           </a:xfrm>
           <a:prstGeom prst="ellipse">
@@ -5101,7 +6270,7 @@
         </p:nvSpPr>
         <p:spPr>
           <a:xfrm>
-            <a:off x="7872984" y="2258568"/>
+            <a:off x="9098280" y="1892808"/>
             <a:ext cx="438912" cy="182880"/>
           </a:xfrm>
           <a:prstGeom prst="rect">
@@ -5124,9 +6293,9 @@
                 <a:solidFill>
                   <a:srgbClr val="C2410C"/>
                 </a:solidFill>
-                <a:latin typeface="Noto Sans CJK JP" pitchFamily="34" charset="0"/>
-                <a:ea typeface="Noto Sans CJK JP" pitchFamily="34" charset="-122"/>
-                <a:cs typeface="Noto Sans CJK JP" pitchFamily="34" charset="-120"/>
+                <a:latin typeface="BIZ UDPGothic" pitchFamily="34" charset="0"/>
+                <a:ea typeface="BIZ UDPGothic" pitchFamily="34" charset="-122"/>
+                <a:cs typeface="BIZ UDPGothic" pitchFamily="34" charset="-120"/>
               </a:rPr>
               <a:t>04</a:t>
             </a:r>
@@ -5142,8 +6311,108 @@
         </p:nvSpPr>
         <p:spPr>
           <a:xfrm>
-            <a:off x="7498080" y="3118104"/>
-            <a:ext cx="1371600" cy="685800"/>
+            <a:off x="8357616" y="2752344"/>
+            <a:ext cx="1920240" cy="1600200"/>
+          </a:xfrm>
+          <a:prstGeom prst="rect">
+            <a:avLst/>
+          </a:prstGeom>
+          <a:noFill/>
+          <a:ln/>
+        </p:spPr>
+        <p:txBody>
+          <a:bodyPr wrap="square" lIns="254" tIns="254" rIns="254" bIns="254" rtlCol="0" anchor="t">
+            <a:normAutofit/>
+          </a:bodyPr>
+          <a:lstStyle/>
+          <a:p>
+            <a:pPr algn="ctr" indent="0" marL="0">
+              <a:buNone/>
+            </a:pPr>
+            <a:r>
+              <a:rPr lang="en-US" sz="1700" dirty="0">
+                <a:solidFill>
+                  <a:srgbClr val="111111"/>
+                </a:solidFill>
+                <a:latin typeface="BIZ UDPGothic" pitchFamily="34" charset="0"/>
+                <a:ea typeface="BIZ UDPGothic" pitchFamily="34" charset="-122"/>
+                <a:cs typeface="BIZ UDPGothic" pitchFamily="34" charset="-120"/>
+              </a:rPr>
+              <a:t>第4週</a:t>
+            </a:r>
+            <a:endParaRPr lang="en-US" sz="1700" dirty="0"/>
+          </a:p>
+          <a:p>
+            <a:pPr algn="ctr" indent="0" marL="0">
+              <a:buNone/>
+            </a:pPr>
+            <a:r>
+              <a:rPr lang="en-US" sz="1700" dirty="0">
+                <a:solidFill>
+                  <a:srgbClr val="111111"/>
+                </a:solidFill>
+                <a:latin typeface="BIZ UDPGothic" pitchFamily="34" charset="0"/>
+                <a:ea typeface="BIZ UDPGothic" pitchFamily="34" charset="-122"/>
+                <a:cs typeface="BIZ UDPGothic" pitchFamily="34" charset="-120"/>
+              </a:rPr>
+              <a:t>意見を聞く</a:t>
+            </a:r>
+            <a:endParaRPr lang="en-US" sz="1700" dirty="0"/>
+          </a:p>
+          <a:p>
+            <a:pPr algn="ctr" indent="0" marL="0">
+              <a:buNone/>
+            </a:pPr>
+            <a:r>
+              <a:rPr lang="en-US" sz="1700" dirty="0">
+                <a:solidFill>
+                  <a:srgbClr val="111111"/>
+                </a:solidFill>
+                <a:latin typeface="BIZ UDPGothic" pitchFamily="34" charset="0"/>
+                <a:ea typeface="BIZ UDPGothic" pitchFamily="34" charset="-122"/>
+                <a:cs typeface="BIZ UDPGothic" pitchFamily="34" charset="-120"/>
+              </a:rPr>
+              <a:t>次回の改善案</a:t>
+            </a:r>
+            <a:endParaRPr lang="en-US" sz="1700" dirty="0"/>
+          </a:p>
+        </p:txBody>
+      </p:sp>
+      <p:sp>
+        <p:nvSpPr>
+          <p:cNvPr id="18" name="Shape 16"/>
+          <p:cNvSpPr/>
+          <p:nvPr/>
+        </p:nvSpPr>
+        <p:spPr>
+          <a:xfrm>
+            <a:off x="960120" y="4480560"/>
+            <a:ext cx="45720" cy="914400"/>
+          </a:xfrm>
+          <a:prstGeom prst="rect">
+            <a:avLst/>
+          </a:prstGeom>
+          <a:solidFill>
+            <a:srgbClr val="C2410C"/>
+          </a:solidFill>
+          <a:ln w="12700">
+            <a:solidFill>
+              <a:srgbClr val="C2410C"/>
+            </a:solidFill>
+            <a:prstDash val="solid"/>
+          </a:ln>
+        </p:spPr>
+      </p:sp>
+      <p:sp>
+        <p:nvSpPr>
+          <p:cNvPr id="19" name="Text 17"/>
+          <p:cNvSpPr txBox="1"/>
+          <p:nvPr/>
+        </p:nvSpPr>
+        <p:spPr>
+          <a:xfrm>
+            <a:off x="1124712" y="4480560"/>
+            <a:ext cx="9802368" cy="219456"/>
           </a:xfrm>
           <a:prstGeom prst="rect">
             <a:avLst/>
@@ -5161,34 +6430,58 @@
               <a:buNone/>
             </a:pPr>
             <a:r>
-              <a:rPr lang="en-US" sz="1280" dirty="0">
+              <a:rPr lang="en-US" sz="1000" b="1" dirty="0">
+                <a:solidFill>
+                  <a:srgbClr val="C2410C"/>
+                </a:solidFill>
+                <a:latin typeface="BIZ UDPGothic" pitchFamily="34" charset="0"/>
+                <a:ea typeface="BIZ UDPGothic" pitchFamily="34" charset="-122"/>
+                <a:cs typeface="BIZ UDPGothic" pitchFamily="34" charset="-120"/>
+              </a:rPr>
+              <a:t>実施前に確認</a:t>
+            </a:r>
+            <a:endParaRPr lang="en-US" sz="1000" dirty="0"/>
+          </a:p>
+        </p:txBody>
+      </p:sp>
+      <p:sp>
+        <p:nvSpPr>
+          <p:cNvPr id="20" name="Text 18"/>
+          <p:cNvSpPr txBox="1"/>
+          <p:nvPr/>
+        </p:nvSpPr>
+        <p:spPr>
+          <a:xfrm>
+            <a:off x="1124712" y="4809744"/>
+            <a:ext cx="9802368" cy="585216"/>
+          </a:xfrm>
+          <a:prstGeom prst="rect">
+            <a:avLst/>
+          </a:prstGeom>
+          <a:noFill/>
+          <a:ln/>
+        </p:spPr>
+        <p:txBody>
+          <a:bodyPr wrap="square" lIns="254" tIns="254" rIns="254" bIns="254" rtlCol="0" anchor="ctr">
+            <a:normAutofit/>
+          </a:bodyPr>
+          <a:lstStyle/>
+          <a:p>
+            <a:pPr algn="l" indent="0" marL="0">
+              <a:buNone/>
+            </a:pPr>
+            <a:r>
+              <a:rPr lang="en-US" sz="1800" b="1" dirty="0">
                 <a:solidFill>
                   <a:srgbClr val="111111"/>
                 </a:solidFill>
-                <a:latin typeface="Noto Sans CJK JP" pitchFamily="34" charset="0"/>
-                <a:ea typeface="Noto Sans CJK JP" pitchFamily="34" charset="-122"/>
-                <a:cs typeface="Noto Sans CJK JP" pitchFamily="34" charset="-120"/>
-              </a:rPr>
-              <a:t>第4週</a:t>
-            </a:r>
-            <a:endParaRPr lang="en-US" sz="1280" dirty="0"/>
-          </a:p>
-          <a:p>
-            <a:pPr algn="l" indent="0" marL="0">
-              <a:buNone/>
-            </a:pPr>
-            <a:r>
-              <a:rPr lang="en-US" sz="1280" dirty="0">
-                <a:solidFill>
-                  <a:srgbClr val="111111"/>
-                </a:solidFill>
-                <a:latin typeface="Noto Sans CJK JP" pitchFamily="34" charset="0"/>
-                <a:ea typeface="Noto Sans CJK JP" pitchFamily="34" charset="-122"/>
-                <a:cs typeface="Noto Sans CJK JP" pitchFamily="34" charset="-120"/>
-              </a:rPr>
-              <a:t>振り返りと改善</a:t>
-            </a:r>
-            <a:endParaRPr lang="en-US" sz="1280" dirty="0"/>
+                <a:latin typeface="BIZ UDPGothic" pitchFamily="34" charset="0"/>
+                <a:ea typeface="BIZ UDPGothic" pitchFamily="34" charset="-122"/>
+                <a:cs typeface="BIZ UDPGothic" pitchFamily="34" charset="-120"/>
+              </a:rPr>
+              <a:t>場所・時間・参加方法を協力書店と相談する。4週間は仮定で、確定日程ではない。</a:t>
+            </a:r>
+            <a:endParaRPr lang="en-US" sz="1800" dirty="0"/>
           </a:p>
         </p:txBody>
       </p:sp>
@@ -5226,107 +6519,7 @@
       </p:grpSpPr>
       <p:sp>
         <p:nvSpPr>
-          <p:cNvPr id="2" name="Shape 0"/>
-          <p:cNvSpPr/>
-          <p:nvPr/>
-        </p:nvSpPr>
-        <p:spPr>
-          <a:xfrm>
-            <a:off x="0" y="0"/>
-            <a:ext cx="12191695" cy="6858000"/>
-          </a:xfrm>
-          <a:prstGeom prst="rect">
-            <a:avLst/>
-          </a:prstGeom>
-          <a:solidFill>
-            <a:srgbClr val="F4F1EA"/>
-          </a:solidFill>
-          <a:ln w="12700">
-            <a:solidFill>
-              <a:srgbClr val="F4F1EA"/>
-            </a:solidFill>
-            <a:prstDash val="solid"/>
-          </a:ln>
-        </p:spPr>
-      </p:sp>
-      <p:sp>
-        <p:nvSpPr>
-          <p:cNvPr id="3" name="Shape 1"/>
-          <p:cNvSpPr/>
-          <p:nvPr/>
-        </p:nvSpPr>
-        <p:spPr>
-          <a:xfrm>
-            <a:off x="8869680" y="0"/>
-            <a:ext cx="3322015" cy="6858000"/>
-          </a:xfrm>
-          <a:prstGeom prst="rect">
-            <a:avLst/>
-          </a:prstGeom>
-          <a:solidFill>
-            <a:srgbClr val="E9E0D1"/>
-          </a:solidFill>
-          <a:ln w="12700">
-            <a:solidFill>
-              <a:srgbClr val="E9E0D1"/>
-            </a:solidFill>
-            <a:prstDash val="solid"/>
-          </a:ln>
-        </p:spPr>
-      </p:sp>
-      <p:sp>
-        <p:nvSpPr>
-          <p:cNvPr id="4" name="Shape 2"/>
-          <p:cNvSpPr/>
-          <p:nvPr/>
-        </p:nvSpPr>
-        <p:spPr>
-          <a:xfrm>
-            <a:off x="0" y="0"/>
-            <a:ext cx="12191695" cy="6858000"/>
-          </a:xfrm>
-          <a:prstGeom prst="rect">
-            <a:avLst/>
-          </a:prstGeom>
-          <a:solidFill>
-            <a:srgbClr val="F4F1EA"/>
-          </a:solidFill>
-          <a:ln w="12700">
-            <a:solidFill>
-              <a:srgbClr val="F4F1EA"/>
-            </a:solidFill>
-            <a:prstDash val="solid"/>
-          </a:ln>
-        </p:spPr>
-      </p:sp>
-      <p:sp>
-        <p:nvSpPr>
-          <p:cNvPr id="5" name="Shape 3"/>
-          <p:cNvSpPr/>
-          <p:nvPr/>
-        </p:nvSpPr>
-        <p:spPr>
-          <a:xfrm>
-            <a:off x="8869680" y="0"/>
-            <a:ext cx="3322015" cy="6858000"/>
-          </a:xfrm>
-          <a:prstGeom prst="rect">
-            <a:avLst/>
-          </a:prstGeom>
-          <a:solidFill>
-            <a:srgbClr val="E9E0D1"/>
-          </a:solidFill>
-          <a:ln w="12700">
-            <a:solidFill>
-              <a:srgbClr val="E9E0D1"/>
-            </a:solidFill>
-            <a:prstDash val="solid"/>
-          </a:ln>
-        </p:spPr>
-      </p:sp>
-      <p:sp>
-        <p:nvSpPr>
-          <p:cNvPr id="6" name="Text 4"/>
+          <p:cNvPr id="2" name="Text 0"/>
           <p:cNvSpPr txBox="1"/>
           <p:nvPr/>
         </p:nvSpPr>
@@ -5355,9 +6548,9 @@
                 <a:solidFill>
                   <a:srgbClr val="C2410C"/>
                 </a:solidFill>
-                <a:latin typeface="Noto Sans CJK JP" pitchFamily="34" charset="0"/>
-                <a:ea typeface="Noto Sans CJK JP" pitchFamily="34" charset="-122"/>
-                <a:cs typeface="Noto Sans CJK JP" pitchFamily="34" charset="-120"/>
+                <a:latin typeface="BIZ UDPGothic" pitchFamily="34" charset="0"/>
+                <a:ea typeface="BIZ UDPGothic" pitchFamily="34" charset="-122"/>
+                <a:cs typeface="BIZ UDPGothic" pitchFamily="34" charset="-120"/>
               </a:rPr>
               <a:t>週末編集室｜架空の企画</a:t>
             </a:r>
@@ -5367,7 +6560,7 @@
       </p:sp>
       <p:sp>
         <p:nvSpPr>
-          <p:cNvPr id="7" name="Text 5"/>
+          <p:cNvPr id="3" name="Text 1"/>
           <p:cNvSpPr txBox="1"/>
           <p:nvPr/>
         </p:nvSpPr>
@@ -5392,40 +6585,40 @@
               <a:buNone/>
             </a:pPr>
             <a:r>
-              <a:rPr lang="en-US" sz="5000" b="1" dirty="0">
+              <a:rPr lang="en-US" sz="4000" b="1" dirty="0">
                 <a:solidFill>
                   <a:srgbClr val="111111"/>
                 </a:solidFill>
-                <a:latin typeface="Noto Serif CJK JP" pitchFamily="34" charset="0"/>
-                <a:ea typeface="Noto Serif CJK JP" pitchFamily="34" charset="-122"/>
-                <a:cs typeface="Noto Serif CJK JP" pitchFamily="34" charset="-120"/>
-              </a:rPr>
-              <a:t>次の一頁を、</a:t>
-            </a:r>
-            <a:endParaRPr lang="en-US" sz="5000" dirty="0"/>
+                <a:latin typeface="Shippori Mincho" pitchFamily="34" charset="0"/>
+                <a:ea typeface="Shippori Mincho" pitchFamily="34" charset="-122"/>
+                <a:cs typeface="Shippori Mincho" pitchFamily="34" charset="-120"/>
+              </a:rPr>
+              <a:t>試行の条件を、</a:t>
+            </a:r>
+            <a:endParaRPr lang="en-US" sz="4000" dirty="0"/>
           </a:p>
           <a:p>
             <a:pPr algn="l" indent="0" marL="0">
               <a:buNone/>
             </a:pPr>
             <a:r>
-              <a:rPr lang="en-US" sz="5000" b="1" dirty="0">
+              <a:rPr lang="en-US" sz="4000" b="1" dirty="0">
                 <a:solidFill>
                   <a:srgbClr val="111111"/>
                 </a:solidFill>
-                <a:latin typeface="Noto Serif CJK JP" pitchFamily="34" charset="0"/>
-                <a:ea typeface="Noto Serif CJK JP" pitchFamily="34" charset="-122"/>
-                <a:cs typeface="Noto Serif CJK JP" pitchFamily="34" charset="-120"/>
-              </a:rPr>
-              <a:t>まちとつくる。</a:t>
-            </a:r>
-            <a:endParaRPr lang="en-US" sz="5000" dirty="0"/>
-          </a:p>
-        </p:txBody>
-      </p:sp>
-      <p:sp>
-        <p:nvSpPr>
-          <p:cNvPr id="8" name="Text 6"/>
+                <a:latin typeface="Shippori Mincho" pitchFamily="34" charset="0"/>
+                <a:ea typeface="Shippori Mincho" pitchFamily="34" charset="-122"/>
+                <a:cs typeface="Shippori Mincho" pitchFamily="34" charset="-120"/>
+              </a:rPr>
+              <a:t>書店と確認する</a:t>
+            </a:r>
+            <a:endParaRPr lang="en-US" sz="4000" dirty="0"/>
+          </a:p>
+        </p:txBody>
+      </p:sp>
+      <p:sp>
+        <p:nvSpPr>
+          <p:cNvPr id="4" name="Text 2"/>
           <p:cNvSpPr txBox="1"/>
           <p:nvPr/>
         </p:nvSpPr>
@@ -5454,11 +6647,11 @@
                 <a:solidFill>
                   <a:srgbClr val="665F58"/>
                 </a:solidFill>
-                <a:latin typeface="Noto Sans CJK JP" pitchFamily="34" charset="0"/>
-                <a:ea typeface="Noto Sans CJK JP" pitchFamily="34" charset="-122"/>
-                <a:cs typeface="Noto Sans CJK JP" pitchFamily="34" charset="-120"/>
-              </a:rPr>
-              <a:t>小さな書店の週末編集室</a:t>
+                <a:latin typeface="BIZ UDPGothic" pitchFamily="34" charset="0"/>
+                <a:ea typeface="BIZ UDPGothic" pitchFamily="34" charset="-122"/>
+                <a:cs typeface="BIZ UDPGothic" pitchFamily="34" charset="-120"/>
+              </a:rPr>
+              <a:t>場所・時間・参加方法を話し合う</a:t>
             </a:r>
             <a:endParaRPr lang="en-US" sz="1800" dirty="0"/>
           </a:p>
@@ -5471,11 +6664,11 @@
                 <a:solidFill>
                   <a:srgbClr val="665F58"/>
                 </a:solidFill>
-                <a:latin typeface="Noto Sans CJK JP" pitchFamily="34" charset="0"/>
-                <a:ea typeface="Noto Sans CJK JP" pitchFamily="34" charset="-122"/>
-                <a:cs typeface="Noto Sans CJK JP" pitchFamily="34" charset="-120"/>
-              </a:rPr>
-              <a:t>架空の企画・制作サンプル</a:t>
+                <a:latin typeface="BIZ UDPGothic" pitchFamily="34" charset="0"/>
+                <a:ea typeface="BIZ UDPGothic" pitchFamily="34" charset="-122"/>
+                <a:cs typeface="BIZ UDPGothic" pitchFamily="34" charset="-120"/>
+              </a:rPr>
+              <a:t>架空の企画・実施前</a:t>
             </a:r>
             <a:endParaRPr lang="en-US" sz="1800" dirty="0"/>
           </a:p>
@@ -5483,7 +6676,7 @@
       </p:sp>
       <p:sp>
         <p:nvSpPr>
-          <p:cNvPr id="9" name="Shape 7"/>
+          <p:cNvPr id="5" name="Shape 3"/>
           <p:cNvSpPr/>
           <p:nvPr/>
         </p:nvSpPr>
@@ -5503,6 +6696,460 @@
             <a:prstDash val="solid"/>
           </a:ln>
         </p:spPr>
+      </p:sp>
+      <p:sp>
+        <p:nvSpPr>
+          <p:cNvPr id="6" name="Text 4"/>
+          <p:cNvSpPr txBox="1"/>
+          <p:nvPr/>
+        </p:nvSpPr>
+        <p:spPr>
+          <a:xfrm>
+            <a:off x="6949440" y="1444752"/>
+            <a:ext cx="4297680" cy="320040"/>
+          </a:xfrm>
+          <a:prstGeom prst="rect">
+            <a:avLst/>
+          </a:prstGeom>
+          <a:noFill/>
+          <a:ln/>
+        </p:spPr>
+        <p:txBody>
+          <a:bodyPr wrap="square" lIns="254" tIns="254" rIns="254" bIns="254" rtlCol="0" anchor="ctr">
+            <a:normAutofit/>
+          </a:bodyPr>
+          <a:lstStyle/>
+          <a:p>
+            <a:pPr algn="l" indent="0" marL="0">
+              <a:buNone/>
+            </a:pPr>
+            <a:r>
+              <a:rPr lang="en-US" sz="1500" b="1" dirty="0">
+                <a:solidFill>
+                  <a:srgbClr val="C2410C"/>
+                </a:solidFill>
+                <a:latin typeface="BIZ UDPGothic" pitchFamily="34" charset="0"/>
+                <a:ea typeface="BIZ UDPGothic" pitchFamily="34" charset="-122"/>
+                <a:cs typeface="BIZ UDPGothic" pitchFamily="34" charset="-120"/>
+              </a:rPr>
+              <a:t>試行前の確認事項</a:t>
+            </a:r>
+            <a:endParaRPr lang="en-US" sz="1500" dirty="0"/>
+          </a:p>
+        </p:txBody>
+      </p:sp>
+      <p:sp>
+        <p:nvSpPr>
+          <p:cNvPr id="7" name="Shape 5"/>
+          <p:cNvSpPr/>
+          <p:nvPr/>
+        </p:nvSpPr>
+        <p:spPr>
+          <a:xfrm>
+            <a:off x="6949440" y="2264664"/>
+            <a:ext cx="347472" cy="347472"/>
+          </a:xfrm>
+          <a:prstGeom prst="ellipse">
+            <a:avLst/>
+          </a:prstGeom>
+          <a:solidFill>
+            <a:srgbClr val="E9E0D1"/>
+          </a:solidFill>
+          <a:ln w="8890">
+            <a:solidFill>
+              <a:srgbClr val="D7CCB9"/>
+            </a:solidFill>
+            <a:prstDash val="solid"/>
+          </a:ln>
+        </p:spPr>
+      </p:sp>
+      <p:sp>
+        <p:nvSpPr>
+          <p:cNvPr id="8" name="Text 6"/>
+          <p:cNvSpPr txBox="1"/>
+          <p:nvPr/>
+        </p:nvSpPr>
+        <p:spPr>
+          <a:xfrm>
+            <a:off x="6949440" y="2264664"/>
+            <a:ext cx="347472" cy="347472"/>
+          </a:xfrm>
+          <a:prstGeom prst="rect">
+            <a:avLst/>
+          </a:prstGeom>
+          <a:noFill/>
+          <a:ln/>
+        </p:spPr>
+        <p:txBody>
+          <a:bodyPr wrap="square" lIns="0" tIns="0" rIns="0" bIns="0" rtlCol="0" anchor="ctr">
+            <a:normAutofit/>
+          </a:bodyPr>
+          <a:lstStyle/>
+          <a:p>
+            <a:pPr algn="ctr" indent="0" marL="0">
+              <a:buNone/>
+            </a:pPr>
+            <a:r>
+              <a:rPr lang="en-US" sz="1000" b="1" dirty="0">
+                <a:solidFill>
+                  <a:srgbClr val="C2410C"/>
+                </a:solidFill>
+                <a:latin typeface="BIZ UDPGothic" pitchFamily="34" charset="0"/>
+                <a:ea typeface="BIZ UDPGothic" pitchFamily="34" charset="-122"/>
+                <a:cs typeface="BIZ UDPGothic" pitchFamily="34" charset="-120"/>
+              </a:rPr>
+              <a:t>1</a:t>
+            </a:r>
+            <a:endParaRPr lang="en-US" sz="1000" dirty="0"/>
+          </a:p>
+        </p:txBody>
+      </p:sp>
+      <p:sp>
+        <p:nvSpPr>
+          <p:cNvPr id="9" name="Text 7"/>
+          <p:cNvSpPr txBox="1"/>
+          <p:nvPr/>
+        </p:nvSpPr>
+        <p:spPr>
+          <a:xfrm>
+            <a:off x="7452360" y="2011680"/>
+            <a:ext cx="3794760" cy="853440"/>
+          </a:xfrm>
+          <a:prstGeom prst="rect">
+            <a:avLst/>
+          </a:prstGeom>
+          <a:noFill/>
+          <a:ln/>
+        </p:spPr>
+        <p:txBody>
+          <a:bodyPr wrap="square" lIns="254" tIns="254" rIns="254" bIns="254" rtlCol="0" anchor="ctr">
+            <a:normAutofit/>
+          </a:bodyPr>
+          <a:lstStyle/>
+          <a:p>
+            <a:pPr algn="l" indent="0" marL="0">
+              <a:buNone/>
+            </a:pPr>
+            <a:r>
+              <a:rPr lang="en-US" sz="1800" dirty="0">
+                <a:solidFill>
+                  <a:srgbClr val="111111"/>
+                </a:solidFill>
+                <a:latin typeface="BIZ UDPGothic" pitchFamily="34" charset="0"/>
+                <a:ea typeface="BIZ UDPGothic" pitchFamily="34" charset="-122"/>
+                <a:cs typeface="BIZ UDPGothic" pitchFamily="34" charset="-120"/>
+              </a:rPr>
+              <a:t>場所と時間</a:t>
+            </a:r>
+            <a:endParaRPr lang="en-US" sz="1800" dirty="0"/>
+          </a:p>
+          <a:p>
+            <a:pPr algn="l" indent="0" marL="0">
+              <a:buNone/>
+            </a:pPr>
+            <a:r>
+              <a:rPr lang="en-US" sz="1800" dirty="0">
+                <a:solidFill>
+                  <a:srgbClr val="111111"/>
+                </a:solidFill>
+                <a:latin typeface="BIZ UDPGothic" pitchFamily="34" charset="0"/>
+                <a:ea typeface="BIZ UDPGothic" pitchFamily="34" charset="-122"/>
+                <a:cs typeface="BIZ UDPGothic" pitchFamily="34" charset="-120"/>
+              </a:rPr>
+              <a:t>営業と両立する場所・時間</a:t>
+            </a:r>
+            <a:endParaRPr lang="en-US" sz="1800" dirty="0"/>
+          </a:p>
+        </p:txBody>
+      </p:sp>
+      <p:sp>
+        <p:nvSpPr>
+          <p:cNvPr id="10" name="Shape 8"/>
+          <p:cNvSpPr/>
+          <p:nvPr/>
+        </p:nvSpPr>
+        <p:spPr>
+          <a:xfrm>
+            <a:off x="6949440" y="3300984"/>
+            <a:ext cx="347472" cy="347472"/>
+          </a:xfrm>
+          <a:prstGeom prst="ellipse">
+            <a:avLst/>
+          </a:prstGeom>
+          <a:solidFill>
+            <a:srgbClr val="E9E0D1"/>
+          </a:solidFill>
+          <a:ln w="8890">
+            <a:solidFill>
+              <a:srgbClr val="D7CCB9"/>
+            </a:solidFill>
+            <a:prstDash val="solid"/>
+          </a:ln>
+        </p:spPr>
+      </p:sp>
+      <p:sp>
+        <p:nvSpPr>
+          <p:cNvPr id="11" name="Text 9"/>
+          <p:cNvSpPr txBox="1"/>
+          <p:nvPr/>
+        </p:nvSpPr>
+        <p:spPr>
+          <a:xfrm>
+            <a:off x="6949440" y="3300984"/>
+            <a:ext cx="347472" cy="347472"/>
+          </a:xfrm>
+          <a:prstGeom prst="rect">
+            <a:avLst/>
+          </a:prstGeom>
+          <a:noFill/>
+          <a:ln/>
+        </p:spPr>
+        <p:txBody>
+          <a:bodyPr wrap="square" lIns="0" tIns="0" rIns="0" bIns="0" rtlCol="0" anchor="ctr">
+            <a:normAutofit/>
+          </a:bodyPr>
+          <a:lstStyle/>
+          <a:p>
+            <a:pPr algn="ctr" indent="0" marL="0">
+              <a:buNone/>
+            </a:pPr>
+            <a:r>
+              <a:rPr lang="en-US" sz="1000" b="1" dirty="0">
+                <a:solidFill>
+                  <a:srgbClr val="C2410C"/>
+                </a:solidFill>
+                <a:latin typeface="BIZ UDPGothic" pitchFamily="34" charset="0"/>
+                <a:ea typeface="BIZ UDPGothic" pitchFamily="34" charset="-122"/>
+                <a:cs typeface="BIZ UDPGothic" pitchFamily="34" charset="-120"/>
+              </a:rPr>
+              <a:t>2</a:t>
+            </a:r>
+            <a:endParaRPr lang="en-US" sz="1000" dirty="0"/>
+          </a:p>
+        </p:txBody>
+      </p:sp>
+      <p:sp>
+        <p:nvSpPr>
+          <p:cNvPr id="12" name="Text 10"/>
+          <p:cNvSpPr txBox="1"/>
+          <p:nvPr/>
+        </p:nvSpPr>
+        <p:spPr>
+          <a:xfrm>
+            <a:off x="7452360" y="3048000"/>
+            <a:ext cx="3794760" cy="853440"/>
+          </a:xfrm>
+          <a:prstGeom prst="rect">
+            <a:avLst/>
+          </a:prstGeom>
+          <a:noFill/>
+          <a:ln/>
+        </p:spPr>
+        <p:txBody>
+          <a:bodyPr wrap="square" lIns="254" tIns="254" rIns="254" bIns="254" rtlCol="0" anchor="ctr">
+            <a:normAutofit/>
+          </a:bodyPr>
+          <a:lstStyle/>
+          <a:p>
+            <a:pPr algn="l" indent="0" marL="0">
+              <a:buNone/>
+            </a:pPr>
+            <a:r>
+              <a:rPr lang="en-US" sz="1800" dirty="0">
+                <a:solidFill>
+                  <a:srgbClr val="111111"/>
+                </a:solidFill>
+                <a:latin typeface="BIZ UDPGothic" pitchFamily="34" charset="0"/>
+                <a:ea typeface="BIZ UDPGothic" pitchFamily="34" charset="-122"/>
+                <a:cs typeface="BIZ UDPGothic" pitchFamily="34" charset="-120"/>
+              </a:rPr>
+              <a:t>運営と参加</a:t>
+            </a:r>
+            <a:endParaRPr lang="en-US" sz="1800" dirty="0"/>
+          </a:p>
+          <a:p>
+            <a:pPr algn="l" indent="0" marL="0">
+              <a:buNone/>
+            </a:pPr>
+            <a:r>
+              <a:rPr lang="en-US" sz="1800" dirty="0">
+                <a:solidFill>
+                  <a:srgbClr val="111111"/>
+                </a:solidFill>
+                <a:latin typeface="BIZ UDPGothic" pitchFamily="34" charset="0"/>
+                <a:ea typeface="BIZ UDPGothic" pitchFamily="34" charset="-122"/>
+                <a:cs typeface="BIZ UDPGothic" pitchFamily="34" charset="-120"/>
+              </a:rPr>
+              <a:t>担当者・募集方法・人数</a:t>
+            </a:r>
+            <a:endParaRPr lang="en-US" sz="1800" dirty="0"/>
+          </a:p>
+        </p:txBody>
+      </p:sp>
+      <p:sp>
+        <p:nvSpPr>
+          <p:cNvPr id="13" name="Shape 11"/>
+          <p:cNvSpPr/>
+          <p:nvPr/>
+        </p:nvSpPr>
+        <p:spPr>
+          <a:xfrm>
+            <a:off x="6949440" y="4337304"/>
+            <a:ext cx="347472" cy="347472"/>
+          </a:xfrm>
+          <a:prstGeom prst="ellipse">
+            <a:avLst/>
+          </a:prstGeom>
+          <a:solidFill>
+            <a:srgbClr val="E9E0D1"/>
+          </a:solidFill>
+          <a:ln w="8890">
+            <a:solidFill>
+              <a:srgbClr val="D7CCB9"/>
+            </a:solidFill>
+            <a:prstDash val="solid"/>
+          </a:ln>
+        </p:spPr>
+      </p:sp>
+      <p:sp>
+        <p:nvSpPr>
+          <p:cNvPr id="14" name="Text 12"/>
+          <p:cNvSpPr txBox="1"/>
+          <p:nvPr/>
+        </p:nvSpPr>
+        <p:spPr>
+          <a:xfrm>
+            <a:off x="6949440" y="4337304"/>
+            <a:ext cx="347472" cy="347472"/>
+          </a:xfrm>
+          <a:prstGeom prst="rect">
+            <a:avLst/>
+          </a:prstGeom>
+          <a:noFill/>
+          <a:ln/>
+        </p:spPr>
+        <p:txBody>
+          <a:bodyPr wrap="square" lIns="0" tIns="0" rIns="0" bIns="0" rtlCol="0" anchor="ctr">
+            <a:normAutofit/>
+          </a:bodyPr>
+          <a:lstStyle/>
+          <a:p>
+            <a:pPr algn="ctr" indent="0" marL="0">
+              <a:buNone/>
+            </a:pPr>
+            <a:r>
+              <a:rPr lang="en-US" sz="1000" b="1" dirty="0">
+                <a:solidFill>
+                  <a:srgbClr val="C2410C"/>
+                </a:solidFill>
+                <a:latin typeface="BIZ UDPGothic" pitchFamily="34" charset="0"/>
+                <a:ea typeface="BIZ UDPGothic" pitchFamily="34" charset="-122"/>
+                <a:cs typeface="BIZ UDPGothic" pitchFamily="34" charset="-120"/>
+              </a:rPr>
+              <a:t>3</a:t>
+            </a:r>
+            <a:endParaRPr lang="en-US" sz="1000" dirty="0"/>
+          </a:p>
+        </p:txBody>
+      </p:sp>
+      <p:sp>
+        <p:nvSpPr>
+          <p:cNvPr id="15" name="Text 13"/>
+          <p:cNvSpPr txBox="1"/>
+          <p:nvPr/>
+        </p:nvSpPr>
+        <p:spPr>
+          <a:xfrm>
+            <a:off x="7452360" y="4084320"/>
+            <a:ext cx="3794760" cy="853440"/>
+          </a:xfrm>
+          <a:prstGeom prst="rect">
+            <a:avLst/>
+          </a:prstGeom>
+          <a:noFill/>
+          <a:ln/>
+        </p:spPr>
+        <p:txBody>
+          <a:bodyPr wrap="square" lIns="254" tIns="254" rIns="254" bIns="254" rtlCol="0" anchor="ctr">
+            <a:normAutofit/>
+          </a:bodyPr>
+          <a:lstStyle/>
+          <a:p>
+            <a:pPr algn="l" indent="0" marL="0">
+              <a:buNone/>
+            </a:pPr>
+            <a:r>
+              <a:rPr lang="en-US" sz="1800" dirty="0">
+                <a:solidFill>
+                  <a:srgbClr val="111111"/>
+                </a:solidFill>
+                <a:latin typeface="BIZ UDPGothic" pitchFamily="34" charset="0"/>
+                <a:ea typeface="BIZ UDPGothic" pitchFamily="34" charset="-122"/>
+                <a:cs typeface="BIZ UDPGothic" pitchFamily="34" charset="-120"/>
+              </a:rPr>
+              <a:t>成果物</a:t>
+            </a:r>
+            <a:endParaRPr lang="en-US" sz="1800" dirty="0"/>
+          </a:p>
+          <a:p>
+            <a:pPr algn="l" indent="0" marL="0">
+              <a:buNone/>
+            </a:pPr>
+            <a:r>
+              <a:rPr lang="en-US" sz="1800" dirty="0">
+                <a:solidFill>
+                  <a:srgbClr val="111111"/>
+                </a:solidFill>
+                <a:latin typeface="BIZ UDPGothic" pitchFamily="34" charset="0"/>
+                <a:ea typeface="BIZ UDPGothic" pitchFamily="34" charset="-122"/>
+                <a:cs typeface="BIZ UDPGothic" pitchFamily="34" charset="-120"/>
+              </a:rPr>
+              <a:t>写真・短文・小冊子の扱い</a:t>
+            </a:r>
+            <a:endParaRPr lang="en-US" sz="1800" dirty="0"/>
+          </a:p>
+        </p:txBody>
+      </p:sp>
+      <p:sp>
+        <p:nvSpPr>
+          <p:cNvPr id="16" name="Text 14"/>
+          <p:cNvSpPr txBox="1"/>
+          <p:nvPr/>
+        </p:nvSpPr>
+        <p:spPr>
+          <a:xfrm>
+            <a:off x="6949440" y="5394960"/>
+            <a:ext cx="4297680" cy="411480"/>
+          </a:xfrm>
+          <a:prstGeom prst="rect">
+            <a:avLst/>
+          </a:prstGeom>
+          <a:noFill/>
+          <a:ln/>
+        </p:spPr>
+        <p:txBody>
+          <a:bodyPr wrap="square" lIns="254" tIns="254" rIns="254" bIns="254" rtlCol="0" anchor="ctr">
+            <a:normAutofit/>
+          </a:bodyPr>
+          <a:lstStyle/>
+          <a:p>
+            <a:pPr algn="l" indent="0" marL="0">
+              <a:buNone/>
+            </a:pPr>
+            <a:r>
+              <a:rPr lang="en-US" sz="1500" dirty="0">
+                <a:solidFill>
+                  <a:srgbClr val="665F58"/>
+                </a:solidFill>
+                <a:latin typeface="BIZ UDPGothic" pitchFamily="34" charset="0"/>
+                <a:ea typeface="BIZ UDPGothic" pitchFamily="34" charset="-122"/>
+                <a:cs typeface="BIZ UDPGothic" pitchFamily="34" charset="-120"/>
+              </a:rPr>
+              <a:t>すべて未確定の相談項目</a:t>
+            </a:r>
+            <a:endParaRPr lang="en-US" sz="1500" dirty="0"/>
+          </a:p>
+        </p:txBody>
       </p:sp>
     </p:spTree>
   </p:cSld>
@@ -5555,7 +7202,7 @@
     </a:clrScheme>
     <a:fontScheme name="Office">
       <a:majorFont>
-        <a:latin typeface="Noto Serif CJK JP"/>
+        <a:latin typeface="Shippori Mincho"/>
         <a:ea typeface=""/>
         <a:cs typeface=""/>
         <a:font script="Jpan" typeface="游ゴシック Light"/>
@@ -5607,7 +7254,7 @@
         <a:font script="Tfng" typeface="Ebrima"/>
       </a:majorFont>
       <a:minorFont>
-        <a:latin typeface="Noto Sans CJK JP"/>
+        <a:latin typeface="BIZ UDPGothic"/>
         <a:ea typeface=""/>
         <a:cs typeface=""/>
         <a:font script="Jpan" typeface="游ゴシック"/>
